--- a/Mapped Curriculum Lessons/Grade 6/Lesson 08 - Counted Loops/Counted Loops - Slides.pptx
+++ b/Mapped Curriculum Lessons/Grade 6/Lesson 08 - Counted Loops/Counted Loops - Slides.pptx
@@ -2,28 +2,28 @@
 <file path=ppt/presentation.xml><?xml version="1.0" encoding="utf-8"?>
 <p:presentation xmlns:p="http://schemas.openxmlformats.org/presentationml/2006/main" embedTrueTypeFonts="1" saveSubsetFonts="0">
   <p:sldMasterIdLst>
-    <p:sldMasterId xmlns:r="http://schemas.openxmlformats.org/officeDocument/2006/relationships" id="2147483648" r:id="R698987c4e8864f46"/>
+    <p:sldMasterId xmlns:r="http://schemas.openxmlformats.org/officeDocument/2006/relationships" id="2147483648" r:id="Reec2f9f9b1034b1c"/>
   </p:sldMasterIdLst>
   <p:notesMasterIdLst>
-    <p:notesMasterId xmlns:r="http://schemas.openxmlformats.org/officeDocument/2006/relationships" r:id="R7e09efc3aa994dfe"/>
+    <p:notesMasterId xmlns:r="http://schemas.openxmlformats.org/officeDocument/2006/relationships" r:id="R2284dc44853e4201"/>
   </p:notesMasterIdLst>
   <p:sldIdLst>
-    <p:sldId xmlns:r="http://schemas.openxmlformats.org/officeDocument/2006/relationships" id="256" r:id="Rf0ebdfaeb2f44405"/>
-    <p:sldId xmlns:r="http://schemas.openxmlformats.org/officeDocument/2006/relationships" id="257" r:id="R077deea081104df5"/>
-    <p:sldId xmlns:r="http://schemas.openxmlformats.org/officeDocument/2006/relationships" id="258" r:id="Rcf17384ed82341d4"/>
-    <p:sldId xmlns:r="http://schemas.openxmlformats.org/officeDocument/2006/relationships" id="259" r:id="R1943f7e224244554"/>
-    <p:sldId xmlns:r="http://schemas.openxmlformats.org/officeDocument/2006/relationships" id="260" r:id="Rbc29d9d707044da7"/>
-    <p:sldId xmlns:r="http://schemas.openxmlformats.org/officeDocument/2006/relationships" id="261" r:id="R5f0a344fef74476a"/>
-    <p:sldId xmlns:r="http://schemas.openxmlformats.org/officeDocument/2006/relationships" id="262" r:id="Rf467251257c045d9"/>
-    <p:sldId xmlns:r="http://schemas.openxmlformats.org/officeDocument/2006/relationships" id="263" r:id="Rbf607dbca24d4b6d"/>
-    <p:sldId xmlns:r="http://schemas.openxmlformats.org/officeDocument/2006/relationships" id="264" r:id="R40e5ae8748124dc3"/>
+    <p:sldId xmlns:r="http://schemas.openxmlformats.org/officeDocument/2006/relationships" id="256" r:id="R90b40c89bd3e4de8"/>
+    <p:sldId xmlns:r="http://schemas.openxmlformats.org/officeDocument/2006/relationships" id="257" r:id="R793fb73d02f94744"/>
+    <p:sldId xmlns:r="http://schemas.openxmlformats.org/officeDocument/2006/relationships" id="258" r:id="Rcb5a9243a9ad4401"/>
+    <p:sldId xmlns:r="http://schemas.openxmlformats.org/officeDocument/2006/relationships" id="259" r:id="R0e9ceccdbb164880"/>
+    <p:sldId xmlns:r="http://schemas.openxmlformats.org/officeDocument/2006/relationships" id="260" r:id="R68b1054477bb425d"/>
+    <p:sldId xmlns:r="http://schemas.openxmlformats.org/officeDocument/2006/relationships" id="261" r:id="Rc101b95000a14009"/>
+    <p:sldId xmlns:r="http://schemas.openxmlformats.org/officeDocument/2006/relationships" id="262" r:id="R46c190918ba84ddf"/>
+    <p:sldId xmlns:r="http://schemas.openxmlformats.org/officeDocument/2006/relationships" id="263" r:id="R930cc56f511641da"/>
+    <p:sldId xmlns:r="http://schemas.openxmlformats.org/officeDocument/2006/relationships" id="264" r:id="R0cb8cdaff088451b"/>
   </p:sldIdLst>
   <p:sldSz cx="12192000" cy="6858000"/>
   <p:notesSz cx="6858000" cy="9144000"/>
   <p:embeddedFontLst>
     <p:embeddedFont>
       <p:font typeface="JetBrains Mono"/>
-      <p:regular xmlns:r="http://schemas.openxmlformats.org/officeDocument/2006/relationships" r:id="Rbcf92b8bde474b86"/>
+      <p:regular xmlns:r="http://schemas.openxmlformats.org/officeDocument/2006/relationships" r:id="R3554bfce05c643ad"/>
     </p:embeddedFont>
   </p:embeddedFontLst>
 </p:presentation>
@@ -1071,7 +1071,7 @@
           <p:nvPr/>
         </p:nvPicPr>
         <p:blipFill rotWithShape="1">
-          <a:blip xmlns:r="http://schemas.openxmlformats.org/officeDocument/2006/relationships" xmlns:a="http://schemas.openxmlformats.org/drawingml/2006/main" r:embed="Rc5aade711afb412b"/>
+          <a:blip xmlns:r="http://schemas.openxmlformats.org/officeDocument/2006/relationships" xmlns:a="http://schemas.openxmlformats.org/drawingml/2006/main" r:embed="R867832e5086d4c3c"/>
           <a:stretch xmlns:a="http://schemas.openxmlformats.org/drawingml/2006/main"/>
         </p:blipFill>
         <p:spPr>
@@ -1451,7 +1451,7 @@
           <p:nvPr/>
         </p:nvPicPr>
         <p:blipFill rotWithShape="1">
-          <a:blip xmlns:r="http://schemas.openxmlformats.org/officeDocument/2006/relationships" xmlns:a="http://schemas.openxmlformats.org/drawingml/2006/main" r:embed="R7ec687bb5a5f4c89">
+          <a:blip xmlns:r="http://schemas.openxmlformats.org/officeDocument/2006/relationships" xmlns:a="http://schemas.openxmlformats.org/drawingml/2006/main" r:embed="Rae6393a3891c4216">
             <a:alphaModFix amt="28000"/>
           </a:blip>
           <a:stretch xmlns:a="http://schemas.openxmlformats.org/drawingml/2006/main"/>
@@ -1664,7 +1664,7 @@
           <p:nvPr/>
         </p:nvPicPr>
         <p:blipFill rotWithShape="1">
-          <a:blip xmlns:r="http://schemas.openxmlformats.org/officeDocument/2006/relationships" xmlns:a="http://schemas.openxmlformats.org/drawingml/2006/main" r:embed="Rb8267c2b680d45f1">
+          <a:blip xmlns:r="http://schemas.openxmlformats.org/officeDocument/2006/relationships" xmlns:a="http://schemas.openxmlformats.org/drawingml/2006/main" r:embed="Rd3fde43c807b4d17">
             <a:alphaModFix amt="28000"/>
           </a:blip>
           <a:stretch xmlns:a="http://schemas.openxmlformats.org/drawingml/2006/main"/>
@@ -1899,7 +1899,7 @@
           <p:nvPr/>
         </p:nvPicPr>
         <p:blipFill rotWithShape="1">
-          <a:blip xmlns:r="http://schemas.openxmlformats.org/officeDocument/2006/relationships" xmlns:a="http://schemas.openxmlformats.org/drawingml/2006/main" r:embed="Rede3f93f97a94b58">
+          <a:blip xmlns:r="http://schemas.openxmlformats.org/officeDocument/2006/relationships" xmlns:a="http://schemas.openxmlformats.org/drawingml/2006/main" r:embed="Rdc37e64dd9064558">
             <a:alphaModFix amt="28000"/>
           </a:blip>
           <a:stretch xmlns:a="http://schemas.openxmlformats.org/drawingml/2006/main"/>
@@ -2176,7 +2176,7 @@
           <p:nvPr/>
         </p:nvPicPr>
         <p:blipFill rotWithShape="1">
-          <a:blip xmlns:r="http://schemas.openxmlformats.org/officeDocument/2006/relationships" xmlns:a="http://schemas.openxmlformats.org/drawingml/2006/main" r:embed="Rcdd291c7845941fb">
+          <a:blip xmlns:r="http://schemas.openxmlformats.org/officeDocument/2006/relationships" xmlns:a="http://schemas.openxmlformats.org/drawingml/2006/main" r:embed="R804b7b1880c7489d">
             <a:alphaModFix amt="28000"/>
           </a:blip>
           <a:stretch xmlns:a="http://schemas.openxmlformats.org/drawingml/2006/main"/>
@@ -2451,7 +2451,7 @@
           <p:nvPr/>
         </p:nvPicPr>
         <p:blipFill rotWithShape="1">
-          <a:blip xmlns:r="http://schemas.openxmlformats.org/officeDocument/2006/relationships" xmlns:a="http://schemas.openxmlformats.org/drawingml/2006/main" r:embed="R44f9375254b14985">
+          <a:blip xmlns:r="http://schemas.openxmlformats.org/officeDocument/2006/relationships" xmlns:a="http://schemas.openxmlformats.org/drawingml/2006/main" r:embed="R8ad852e0ff7c4a5f">
             <a:alphaModFix amt="28000"/>
           </a:blip>
           <a:stretch xmlns:a="http://schemas.openxmlformats.org/drawingml/2006/main"/>
@@ -2875,7 +2875,7 @@
           <p:nvPr/>
         </p:nvPicPr>
         <p:blipFill rotWithShape="1">
-          <a:blip xmlns:r="http://schemas.openxmlformats.org/officeDocument/2006/relationships" xmlns:a="http://schemas.openxmlformats.org/drawingml/2006/main" r:embed="Rcc26309be86f453c">
+          <a:blip xmlns:r="http://schemas.openxmlformats.org/officeDocument/2006/relationships" xmlns:a="http://schemas.openxmlformats.org/drawingml/2006/main" r:embed="R9e084d6893d94f2a">
             <a:alphaModFix amt="28000"/>
           </a:blip>
           <a:stretch xmlns:a="http://schemas.openxmlformats.org/drawingml/2006/main"/>
@@ -3016,7 +3016,7 @@
           <p:nvPr/>
         </p:nvPicPr>
         <p:blipFill rotWithShape="1">
-          <a:blip xmlns:r="http://schemas.openxmlformats.org/officeDocument/2006/relationships" xmlns:a="http://schemas.openxmlformats.org/drawingml/2006/main" r:embed="R793f62fa5a644f5c">
+          <a:blip xmlns:r="http://schemas.openxmlformats.org/officeDocument/2006/relationships" xmlns:a="http://schemas.openxmlformats.org/drawingml/2006/main" r:embed="Re5d960708fd94962">
             <a:alphaModFix amt="28000"/>
           </a:blip>
           <a:stretch xmlns:a="http://schemas.openxmlformats.org/drawingml/2006/main"/>
@@ -3130,7 +3130,7 @@
           <p:nvPr/>
         </p:nvPicPr>
         <p:blipFill rotWithShape="1">
-          <a:blip xmlns:r="http://schemas.openxmlformats.org/officeDocument/2006/relationships" xmlns:a="http://schemas.openxmlformats.org/drawingml/2006/main" r:embed="Re93b0746feac4286">
+          <a:blip xmlns:r="http://schemas.openxmlformats.org/officeDocument/2006/relationships" xmlns:a="http://schemas.openxmlformats.org/drawingml/2006/main" r:embed="Rdb0c14a9137b49b0">
             <a:alphaModFix amt="28000"/>
           </a:blip>
           <a:stretch xmlns:a="http://schemas.openxmlformats.org/drawingml/2006/main"/>
@@ -3457,7 +3457,7 @@
           <p:nvPr/>
         </p:nvPicPr>
         <p:blipFill rotWithShape="1">
-          <a:blip xmlns:r="http://schemas.openxmlformats.org/officeDocument/2006/relationships" xmlns:a="http://schemas.openxmlformats.org/drawingml/2006/main" r:embed="Raeb4d86e4da047a2">
+          <a:blip xmlns:r="http://schemas.openxmlformats.org/officeDocument/2006/relationships" xmlns:a="http://schemas.openxmlformats.org/drawingml/2006/main" r:embed="Ra53630d3d1da457e">
             <a:alphaModFix amt="28000"/>
           </a:blip>
           <a:stretch xmlns:a="http://schemas.openxmlformats.org/drawingml/2006/main"/>
@@ -3745,7 +3745,7 @@
           <p:nvPr/>
         </p:nvPicPr>
         <p:blipFill rotWithShape="1">
-          <a:blip xmlns:r="http://schemas.openxmlformats.org/officeDocument/2006/relationships" xmlns:a="http://schemas.openxmlformats.org/drawingml/2006/main" r:embed="Rd146de8919a24ab4">
+          <a:blip xmlns:r="http://schemas.openxmlformats.org/officeDocument/2006/relationships" xmlns:a="http://schemas.openxmlformats.org/drawingml/2006/main" r:embed="Ra219535399a54b92">
             <a:alphaModFix amt="28000"/>
           </a:blip>
           <a:stretch xmlns:a="http://schemas.openxmlformats.org/drawingml/2006/main"/>
@@ -3982,17 +3982,17 @@
   </p:cSld>
   <p:clrMap bg1="lt1" tx1="dk1" bg2="lt2" tx2="dk2" accent1="accent1" accent2="accent2" accent3="accent3" accent4="accent4" accent5="accent5" accent6="accent6" hlink="hlink" folHlink="folHlink"/>
   <p:sldLayoutIdLst>
-    <p:sldLayoutId xmlns:r="http://schemas.openxmlformats.org/officeDocument/2006/relationships" id="2147483649" r:id="Ra78f0e33598149cf"/>
-    <p:sldLayoutId xmlns:r="http://schemas.openxmlformats.org/officeDocument/2006/relationships" id="2147483650" r:id="Rb6ba684f6deb45a2"/>
-    <p:sldLayoutId xmlns:r="http://schemas.openxmlformats.org/officeDocument/2006/relationships" id="2147483651" r:id="R97941c5c4250492c"/>
-    <p:sldLayoutId xmlns:r="http://schemas.openxmlformats.org/officeDocument/2006/relationships" id="2147483652" r:id="R23bd458aa1394f39"/>
-    <p:sldLayoutId xmlns:r="http://schemas.openxmlformats.org/officeDocument/2006/relationships" id="2147483653" r:id="Rbd8bbf794f35458f"/>
-    <p:sldLayoutId xmlns:r="http://schemas.openxmlformats.org/officeDocument/2006/relationships" id="2147483654" r:id="R400cd808d7864600"/>
-    <p:sldLayoutId xmlns:r="http://schemas.openxmlformats.org/officeDocument/2006/relationships" id="2147483655" r:id="R818b69b176de467b"/>
-    <p:sldLayoutId xmlns:r="http://schemas.openxmlformats.org/officeDocument/2006/relationships" id="2147483656" r:id="R787a23fc69894873"/>
-    <p:sldLayoutId xmlns:r="http://schemas.openxmlformats.org/officeDocument/2006/relationships" id="2147483657" r:id="R0ab5ca180f9c42e5"/>
-    <p:sldLayoutId xmlns:r="http://schemas.openxmlformats.org/officeDocument/2006/relationships" id="2147483658" r:id="R25da7219c19f4649"/>
-    <p:sldLayoutId xmlns:r="http://schemas.openxmlformats.org/officeDocument/2006/relationships" id="2147483659" r:id="R2e53a380f2044a60"/>
+    <p:sldLayoutId xmlns:r="http://schemas.openxmlformats.org/officeDocument/2006/relationships" id="2147483649" r:id="Rc2d1a606656d498d"/>
+    <p:sldLayoutId xmlns:r="http://schemas.openxmlformats.org/officeDocument/2006/relationships" id="2147483650" r:id="R12ca4d4f1e9b4560"/>
+    <p:sldLayoutId xmlns:r="http://schemas.openxmlformats.org/officeDocument/2006/relationships" id="2147483651" r:id="R06060b63c8ba48c2"/>
+    <p:sldLayoutId xmlns:r="http://schemas.openxmlformats.org/officeDocument/2006/relationships" id="2147483652" r:id="R67a770d8afd44a11"/>
+    <p:sldLayoutId xmlns:r="http://schemas.openxmlformats.org/officeDocument/2006/relationships" id="2147483653" r:id="R2795d8f592874ae8"/>
+    <p:sldLayoutId xmlns:r="http://schemas.openxmlformats.org/officeDocument/2006/relationships" id="2147483654" r:id="Rfd70916b78154a0f"/>
+    <p:sldLayoutId xmlns:r="http://schemas.openxmlformats.org/officeDocument/2006/relationships" id="2147483655" r:id="Rad66367f12a143d9"/>
+    <p:sldLayoutId xmlns:r="http://schemas.openxmlformats.org/officeDocument/2006/relationships" id="2147483656" r:id="R7cc2041d951d4e8d"/>
+    <p:sldLayoutId xmlns:r="http://schemas.openxmlformats.org/officeDocument/2006/relationships" id="2147483657" r:id="Rd3948be0261f4b9b"/>
+    <p:sldLayoutId xmlns:r="http://schemas.openxmlformats.org/officeDocument/2006/relationships" id="2147483658" r:id="Re75b280fbb814587"/>
+    <p:sldLayoutId xmlns:r="http://schemas.openxmlformats.org/officeDocument/2006/relationships" id="2147483659" r:id="R9db9d26af6744562"/>
   </p:sldLayoutIdLst>
   <p:hf hdr="0" ftr="0" dt="0"/>
   <p:txStyles>

--- a/Mapped Curriculum Lessons/Grade 6/Lesson 08 - Counted Loops/Counted Loops - Slides.pptx
+++ b/Mapped Curriculum Lessons/Grade 6/Lesson 08 - Counted Loops/Counted Loops - Slides.pptx
@@ -2,28 +2,28 @@
 <file path=ppt/presentation.xml><?xml version="1.0" encoding="utf-8"?>
 <p:presentation xmlns:p="http://schemas.openxmlformats.org/presentationml/2006/main" embedTrueTypeFonts="1" saveSubsetFonts="0">
   <p:sldMasterIdLst>
-    <p:sldMasterId xmlns:r="http://schemas.openxmlformats.org/officeDocument/2006/relationships" id="2147483648" r:id="Reec2f9f9b1034b1c"/>
+    <p:sldMasterId xmlns:r="http://schemas.openxmlformats.org/officeDocument/2006/relationships" id="2147483648" r:id="R27e68bc636584ffa"/>
   </p:sldMasterIdLst>
   <p:notesMasterIdLst>
-    <p:notesMasterId xmlns:r="http://schemas.openxmlformats.org/officeDocument/2006/relationships" r:id="R2284dc44853e4201"/>
+    <p:notesMasterId xmlns:r="http://schemas.openxmlformats.org/officeDocument/2006/relationships" r:id="R070cc2316d4142d9"/>
   </p:notesMasterIdLst>
   <p:sldIdLst>
-    <p:sldId xmlns:r="http://schemas.openxmlformats.org/officeDocument/2006/relationships" id="256" r:id="R90b40c89bd3e4de8"/>
-    <p:sldId xmlns:r="http://schemas.openxmlformats.org/officeDocument/2006/relationships" id="257" r:id="R793fb73d02f94744"/>
-    <p:sldId xmlns:r="http://schemas.openxmlformats.org/officeDocument/2006/relationships" id="258" r:id="Rcb5a9243a9ad4401"/>
-    <p:sldId xmlns:r="http://schemas.openxmlformats.org/officeDocument/2006/relationships" id="259" r:id="R0e9ceccdbb164880"/>
-    <p:sldId xmlns:r="http://schemas.openxmlformats.org/officeDocument/2006/relationships" id="260" r:id="R68b1054477bb425d"/>
-    <p:sldId xmlns:r="http://schemas.openxmlformats.org/officeDocument/2006/relationships" id="261" r:id="Rc101b95000a14009"/>
-    <p:sldId xmlns:r="http://schemas.openxmlformats.org/officeDocument/2006/relationships" id="262" r:id="R46c190918ba84ddf"/>
-    <p:sldId xmlns:r="http://schemas.openxmlformats.org/officeDocument/2006/relationships" id="263" r:id="R930cc56f511641da"/>
-    <p:sldId xmlns:r="http://schemas.openxmlformats.org/officeDocument/2006/relationships" id="264" r:id="R0cb8cdaff088451b"/>
+    <p:sldId xmlns:r="http://schemas.openxmlformats.org/officeDocument/2006/relationships" id="256" r:id="Re5f8cc66c03943d2"/>
+    <p:sldId xmlns:r="http://schemas.openxmlformats.org/officeDocument/2006/relationships" id="257" r:id="Refcee637036d4525"/>
+    <p:sldId xmlns:r="http://schemas.openxmlformats.org/officeDocument/2006/relationships" id="258" r:id="Rbf3b45e82e184f42"/>
+    <p:sldId xmlns:r="http://schemas.openxmlformats.org/officeDocument/2006/relationships" id="259" r:id="R44afa5663e0d4f35"/>
+    <p:sldId xmlns:r="http://schemas.openxmlformats.org/officeDocument/2006/relationships" id="260" r:id="Rd0e294ac99fe4c82"/>
+    <p:sldId xmlns:r="http://schemas.openxmlformats.org/officeDocument/2006/relationships" id="261" r:id="Rdc08e578800a4bd3"/>
+    <p:sldId xmlns:r="http://schemas.openxmlformats.org/officeDocument/2006/relationships" id="262" r:id="Rc42f163a0a6c43a3"/>
+    <p:sldId xmlns:r="http://schemas.openxmlformats.org/officeDocument/2006/relationships" id="263" r:id="R98ee1c0f0d524e4f"/>
+    <p:sldId xmlns:r="http://schemas.openxmlformats.org/officeDocument/2006/relationships" id="264" r:id="R1d23822c36ce466e"/>
   </p:sldIdLst>
   <p:sldSz cx="12192000" cy="6858000"/>
   <p:notesSz cx="6858000" cy="9144000"/>
   <p:embeddedFontLst>
     <p:embeddedFont>
       <p:font typeface="JetBrains Mono"/>
-      <p:regular xmlns:r="http://schemas.openxmlformats.org/officeDocument/2006/relationships" r:id="R3554bfce05c643ad"/>
+      <p:regular xmlns:r="http://schemas.openxmlformats.org/officeDocument/2006/relationships" r:id="R338eeacfe1784df4"/>
     </p:embeddedFont>
   </p:embeddedFontLst>
 </p:presentation>
@@ -1071,7 +1071,7 @@
           <p:nvPr/>
         </p:nvPicPr>
         <p:blipFill rotWithShape="1">
-          <a:blip xmlns:r="http://schemas.openxmlformats.org/officeDocument/2006/relationships" xmlns:a="http://schemas.openxmlformats.org/drawingml/2006/main" r:embed="R867832e5086d4c3c"/>
+          <a:blip xmlns:r="http://schemas.openxmlformats.org/officeDocument/2006/relationships" xmlns:a="http://schemas.openxmlformats.org/drawingml/2006/main" r:embed="R80cbdca53b764c75"/>
           <a:stretch xmlns:a="http://schemas.openxmlformats.org/drawingml/2006/main"/>
         </p:blipFill>
         <p:spPr>
@@ -1451,7 +1451,7 @@
           <p:nvPr/>
         </p:nvPicPr>
         <p:blipFill rotWithShape="1">
-          <a:blip xmlns:r="http://schemas.openxmlformats.org/officeDocument/2006/relationships" xmlns:a="http://schemas.openxmlformats.org/drawingml/2006/main" r:embed="Rae6393a3891c4216">
+          <a:blip xmlns:r="http://schemas.openxmlformats.org/officeDocument/2006/relationships" xmlns:a="http://schemas.openxmlformats.org/drawingml/2006/main" r:embed="R21e32182d17141c3">
             <a:alphaModFix amt="28000"/>
           </a:blip>
           <a:stretch xmlns:a="http://schemas.openxmlformats.org/drawingml/2006/main"/>
@@ -1664,7 +1664,7 @@
           <p:nvPr/>
         </p:nvPicPr>
         <p:blipFill rotWithShape="1">
-          <a:blip xmlns:r="http://schemas.openxmlformats.org/officeDocument/2006/relationships" xmlns:a="http://schemas.openxmlformats.org/drawingml/2006/main" r:embed="Rd3fde43c807b4d17">
+          <a:blip xmlns:r="http://schemas.openxmlformats.org/officeDocument/2006/relationships" xmlns:a="http://schemas.openxmlformats.org/drawingml/2006/main" r:embed="Re138bd3aeee74924">
             <a:alphaModFix amt="28000"/>
           </a:blip>
           <a:stretch xmlns:a="http://schemas.openxmlformats.org/drawingml/2006/main"/>
@@ -1899,7 +1899,7 @@
           <p:nvPr/>
         </p:nvPicPr>
         <p:blipFill rotWithShape="1">
-          <a:blip xmlns:r="http://schemas.openxmlformats.org/officeDocument/2006/relationships" xmlns:a="http://schemas.openxmlformats.org/drawingml/2006/main" r:embed="Rdc37e64dd9064558">
+          <a:blip xmlns:r="http://schemas.openxmlformats.org/officeDocument/2006/relationships" xmlns:a="http://schemas.openxmlformats.org/drawingml/2006/main" r:embed="Rbd1d9267879d42c2">
             <a:alphaModFix amt="28000"/>
           </a:blip>
           <a:stretch xmlns:a="http://schemas.openxmlformats.org/drawingml/2006/main"/>
@@ -2176,7 +2176,7 @@
           <p:nvPr/>
         </p:nvPicPr>
         <p:blipFill rotWithShape="1">
-          <a:blip xmlns:r="http://schemas.openxmlformats.org/officeDocument/2006/relationships" xmlns:a="http://schemas.openxmlformats.org/drawingml/2006/main" r:embed="R804b7b1880c7489d">
+          <a:blip xmlns:r="http://schemas.openxmlformats.org/officeDocument/2006/relationships" xmlns:a="http://schemas.openxmlformats.org/drawingml/2006/main" r:embed="Re403a1a6cacb4489">
             <a:alphaModFix amt="28000"/>
           </a:blip>
           <a:stretch xmlns:a="http://schemas.openxmlformats.org/drawingml/2006/main"/>
@@ -2451,7 +2451,7 @@
           <p:nvPr/>
         </p:nvPicPr>
         <p:blipFill rotWithShape="1">
-          <a:blip xmlns:r="http://schemas.openxmlformats.org/officeDocument/2006/relationships" xmlns:a="http://schemas.openxmlformats.org/drawingml/2006/main" r:embed="R8ad852e0ff7c4a5f">
+          <a:blip xmlns:r="http://schemas.openxmlformats.org/officeDocument/2006/relationships" xmlns:a="http://schemas.openxmlformats.org/drawingml/2006/main" r:embed="Rc1e0cf80e1324ffb">
             <a:alphaModFix amt="28000"/>
           </a:blip>
           <a:stretch xmlns:a="http://schemas.openxmlformats.org/drawingml/2006/main"/>
@@ -2875,7 +2875,7 @@
           <p:nvPr/>
         </p:nvPicPr>
         <p:blipFill rotWithShape="1">
-          <a:blip xmlns:r="http://schemas.openxmlformats.org/officeDocument/2006/relationships" xmlns:a="http://schemas.openxmlformats.org/drawingml/2006/main" r:embed="R9e084d6893d94f2a">
+          <a:blip xmlns:r="http://schemas.openxmlformats.org/officeDocument/2006/relationships" xmlns:a="http://schemas.openxmlformats.org/drawingml/2006/main" r:embed="R058c87e32a924600">
             <a:alphaModFix amt="28000"/>
           </a:blip>
           <a:stretch xmlns:a="http://schemas.openxmlformats.org/drawingml/2006/main"/>
@@ -3016,7 +3016,7 @@
           <p:nvPr/>
         </p:nvPicPr>
         <p:blipFill rotWithShape="1">
-          <a:blip xmlns:r="http://schemas.openxmlformats.org/officeDocument/2006/relationships" xmlns:a="http://schemas.openxmlformats.org/drawingml/2006/main" r:embed="Re5d960708fd94962">
+          <a:blip xmlns:r="http://schemas.openxmlformats.org/officeDocument/2006/relationships" xmlns:a="http://schemas.openxmlformats.org/drawingml/2006/main" r:embed="R3bd786349a734714">
             <a:alphaModFix amt="28000"/>
           </a:blip>
           <a:stretch xmlns:a="http://schemas.openxmlformats.org/drawingml/2006/main"/>
@@ -3130,7 +3130,7 @@
           <p:nvPr/>
         </p:nvPicPr>
         <p:blipFill rotWithShape="1">
-          <a:blip xmlns:r="http://schemas.openxmlformats.org/officeDocument/2006/relationships" xmlns:a="http://schemas.openxmlformats.org/drawingml/2006/main" r:embed="Rdb0c14a9137b49b0">
+          <a:blip xmlns:r="http://schemas.openxmlformats.org/officeDocument/2006/relationships" xmlns:a="http://schemas.openxmlformats.org/drawingml/2006/main" r:embed="R3c213a54ada945b1">
             <a:alphaModFix amt="28000"/>
           </a:blip>
           <a:stretch xmlns:a="http://schemas.openxmlformats.org/drawingml/2006/main"/>
@@ -3457,7 +3457,7 @@
           <p:nvPr/>
         </p:nvPicPr>
         <p:blipFill rotWithShape="1">
-          <a:blip xmlns:r="http://schemas.openxmlformats.org/officeDocument/2006/relationships" xmlns:a="http://schemas.openxmlformats.org/drawingml/2006/main" r:embed="Ra53630d3d1da457e">
+          <a:blip xmlns:r="http://schemas.openxmlformats.org/officeDocument/2006/relationships" xmlns:a="http://schemas.openxmlformats.org/drawingml/2006/main" r:embed="R74b18903c1e04f64">
             <a:alphaModFix amt="28000"/>
           </a:blip>
           <a:stretch xmlns:a="http://schemas.openxmlformats.org/drawingml/2006/main"/>
@@ -3745,7 +3745,7 @@
           <p:nvPr/>
         </p:nvPicPr>
         <p:blipFill rotWithShape="1">
-          <a:blip xmlns:r="http://schemas.openxmlformats.org/officeDocument/2006/relationships" xmlns:a="http://schemas.openxmlformats.org/drawingml/2006/main" r:embed="Ra219535399a54b92">
+          <a:blip xmlns:r="http://schemas.openxmlformats.org/officeDocument/2006/relationships" xmlns:a="http://schemas.openxmlformats.org/drawingml/2006/main" r:embed="R51ccb7aad681468d">
             <a:alphaModFix amt="28000"/>
           </a:blip>
           <a:stretch xmlns:a="http://schemas.openxmlformats.org/drawingml/2006/main"/>
@@ -3982,17 +3982,17 @@
   </p:cSld>
   <p:clrMap bg1="lt1" tx1="dk1" bg2="lt2" tx2="dk2" accent1="accent1" accent2="accent2" accent3="accent3" accent4="accent4" accent5="accent5" accent6="accent6" hlink="hlink" folHlink="folHlink"/>
   <p:sldLayoutIdLst>
-    <p:sldLayoutId xmlns:r="http://schemas.openxmlformats.org/officeDocument/2006/relationships" id="2147483649" r:id="Rc2d1a606656d498d"/>
-    <p:sldLayoutId xmlns:r="http://schemas.openxmlformats.org/officeDocument/2006/relationships" id="2147483650" r:id="R12ca4d4f1e9b4560"/>
-    <p:sldLayoutId xmlns:r="http://schemas.openxmlformats.org/officeDocument/2006/relationships" id="2147483651" r:id="R06060b63c8ba48c2"/>
-    <p:sldLayoutId xmlns:r="http://schemas.openxmlformats.org/officeDocument/2006/relationships" id="2147483652" r:id="R67a770d8afd44a11"/>
-    <p:sldLayoutId xmlns:r="http://schemas.openxmlformats.org/officeDocument/2006/relationships" id="2147483653" r:id="R2795d8f592874ae8"/>
-    <p:sldLayoutId xmlns:r="http://schemas.openxmlformats.org/officeDocument/2006/relationships" id="2147483654" r:id="Rfd70916b78154a0f"/>
-    <p:sldLayoutId xmlns:r="http://schemas.openxmlformats.org/officeDocument/2006/relationships" id="2147483655" r:id="Rad66367f12a143d9"/>
-    <p:sldLayoutId xmlns:r="http://schemas.openxmlformats.org/officeDocument/2006/relationships" id="2147483656" r:id="R7cc2041d951d4e8d"/>
-    <p:sldLayoutId xmlns:r="http://schemas.openxmlformats.org/officeDocument/2006/relationships" id="2147483657" r:id="Rd3948be0261f4b9b"/>
-    <p:sldLayoutId xmlns:r="http://schemas.openxmlformats.org/officeDocument/2006/relationships" id="2147483658" r:id="Re75b280fbb814587"/>
-    <p:sldLayoutId xmlns:r="http://schemas.openxmlformats.org/officeDocument/2006/relationships" id="2147483659" r:id="R9db9d26af6744562"/>
+    <p:sldLayoutId xmlns:r="http://schemas.openxmlformats.org/officeDocument/2006/relationships" id="2147483649" r:id="Rede20f4d32ea463f"/>
+    <p:sldLayoutId xmlns:r="http://schemas.openxmlformats.org/officeDocument/2006/relationships" id="2147483650" r:id="R190a0aa3a7394aef"/>
+    <p:sldLayoutId xmlns:r="http://schemas.openxmlformats.org/officeDocument/2006/relationships" id="2147483651" r:id="R3f33fd8e18f440a4"/>
+    <p:sldLayoutId xmlns:r="http://schemas.openxmlformats.org/officeDocument/2006/relationships" id="2147483652" r:id="R9b3659f110da4b5e"/>
+    <p:sldLayoutId xmlns:r="http://schemas.openxmlformats.org/officeDocument/2006/relationships" id="2147483653" r:id="R2876900e0b2c42ef"/>
+    <p:sldLayoutId xmlns:r="http://schemas.openxmlformats.org/officeDocument/2006/relationships" id="2147483654" r:id="R531cfd0279354f12"/>
+    <p:sldLayoutId xmlns:r="http://schemas.openxmlformats.org/officeDocument/2006/relationships" id="2147483655" r:id="Rc1cc6bbadec64d94"/>
+    <p:sldLayoutId xmlns:r="http://schemas.openxmlformats.org/officeDocument/2006/relationships" id="2147483656" r:id="R0c9e2a1f551d427e"/>
+    <p:sldLayoutId xmlns:r="http://schemas.openxmlformats.org/officeDocument/2006/relationships" id="2147483657" r:id="Rd9bb57cc775342d2"/>
+    <p:sldLayoutId xmlns:r="http://schemas.openxmlformats.org/officeDocument/2006/relationships" id="2147483658" r:id="R739133b1c18c4e5d"/>
+    <p:sldLayoutId xmlns:r="http://schemas.openxmlformats.org/officeDocument/2006/relationships" id="2147483659" r:id="R643deaa3e2d94194"/>
   </p:sldLayoutIdLst>
   <p:hf hdr="0" ftr="0" dt="0"/>
   <p:txStyles>
@@ -7051,7 +7051,7 @@
                 <a:ea typeface="Calibri"/>
                 <a:cs typeface="Calibri"/>
               </a:rPr>
-              <a:t>The display stops too soon. Change </a:t>
+              <a:t>Change </a:t>
             </a:r>
             <a:r>
               <a:rPr sz="2400" b="0">
@@ -7073,7 +7073,51 @@
                 <a:ea typeface="Calibri"/>
                 <a:cs typeface="Calibri"/>
               </a:rPr>
-              <a:t> so the starter prints the first ten multiples, then check that the final line is the tenth multiple.</a:t>
+              <a:t> so [count] uses the numbers 1 through 10. For the input 4, the first line must be </a:t>
+            </a:r>
+            <a:r>
+              <a:rPr sz="2400" b="0">
+                <a:solidFill>
+                  <a:srgbClr val="067D17"/>
+                </a:solidFill>
+                <a:latin typeface="JetBrains Mono"/>
+                <a:ea typeface="JetBrains Mono"/>
+                <a:cs typeface="JetBrains Mono"/>
+              </a:rPr>
+              <a:t>"4 x 1 = 4"</a:t>
+            </a:r>
+            <a:r>
+              <a:rPr sz="2400" b="0">
+                <a:solidFill>
+                  <a:srgbClr val="080808"/>
+                </a:solidFill>
+                <a:latin typeface="Calibri"/>
+                <a:ea typeface="Calibri"/>
+                <a:cs typeface="Calibri"/>
+              </a:rPr>
+              <a:t> and the last line must be </a:t>
+            </a:r>
+            <a:r>
+              <a:rPr sz="2400" b="0">
+                <a:solidFill>
+                  <a:srgbClr val="067D17"/>
+                </a:solidFill>
+                <a:latin typeface="JetBrains Mono"/>
+                <a:ea typeface="JetBrains Mono"/>
+                <a:cs typeface="JetBrains Mono"/>
+              </a:rPr>
+              <a:t>"4 x 10 = 40"</a:t>
+            </a:r>
+            <a:r>
+              <a:rPr sz="2400" b="0">
+                <a:solidFill>
+                  <a:srgbClr val="080808"/>
+                </a:solidFill>
+                <a:latin typeface="Calibri"/>
+                <a:ea typeface="Calibri"/>
+                <a:cs typeface="Calibri"/>
+              </a:rPr>
+              <a:t>.</a:t>
             </a:r>
           </a:p>
         </p:txBody>
@@ -7688,7 +7732,7 @@
                 <a:ea typeface="Calibri"/>
                 <a:cs typeface="Calibri"/>
               </a:rPr>
-              <a:t>Let the user choose where the table begins. Use </a:t>
+              <a:t>Ask which table line to start with and store the whole number in [start]. Use </a:t>
             </a:r>
             <a:r>
               <a:rPr sz="2400" b="0">
@@ -7710,7 +7754,51 @@
                 <a:ea typeface="Calibri"/>
                 <a:cs typeface="Calibri"/>
               </a:rPr>
-              <a:t> with that starting multiplier to display five consecutive multiples.</a:t>
+              <a:t> to display five lines beginning with [start]. For table 3 and start 4, display lines from </a:t>
+            </a:r>
+            <a:r>
+              <a:rPr sz="2400" b="0">
+                <a:solidFill>
+                  <a:srgbClr val="067D17"/>
+                </a:solidFill>
+                <a:latin typeface="JetBrains Mono"/>
+                <a:ea typeface="JetBrains Mono"/>
+                <a:cs typeface="JetBrains Mono"/>
+              </a:rPr>
+              <a:t>"3 x 4 = 12"</a:t>
+            </a:r>
+            <a:r>
+              <a:rPr sz="2400" b="0">
+                <a:solidFill>
+                  <a:srgbClr val="080808"/>
+                </a:solidFill>
+                <a:latin typeface="Calibri"/>
+                <a:ea typeface="Calibri"/>
+                <a:cs typeface="Calibri"/>
+              </a:rPr>
+              <a:t> through </a:t>
+            </a:r>
+            <a:r>
+              <a:rPr sz="2400" b="0">
+                <a:solidFill>
+                  <a:srgbClr val="067D17"/>
+                </a:solidFill>
+                <a:latin typeface="JetBrains Mono"/>
+                <a:ea typeface="JetBrains Mono"/>
+                <a:cs typeface="JetBrains Mono"/>
+              </a:rPr>
+              <a:t>"3 x 8 = 24"</a:t>
+            </a:r>
+            <a:r>
+              <a:rPr sz="2400" b="0">
+                <a:solidFill>
+                  <a:srgbClr val="080808"/>
+                </a:solidFill>
+                <a:latin typeface="Calibri"/>
+                <a:ea typeface="Calibri"/>
+                <a:cs typeface="Calibri"/>
+              </a:rPr>
+              <a:t>.</a:t>
             </a:r>
           </a:p>
         </p:txBody>

--- a/Mapped Curriculum Lessons/Grade 6/Lesson 08 - Counted Loops/Counted Loops - Slides.pptx
+++ b/Mapped Curriculum Lessons/Grade 6/Lesson 08 - Counted Loops/Counted Loops - Slides.pptx
@@ -2,28 +2,28 @@
 <file path=ppt/presentation.xml><?xml version="1.0" encoding="utf-8"?>
 <p:presentation xmlns:p="http://schemas.openxmlformats.org/presentationml/2006/main" embedTrueTypeFonts="1" saveSubsetFonts="0">
   <p:sldMasterIdLst>
-    <p:sldMasterId xmlns:r="http://schemas.openxmlformats.org/officeDocument/2006/relationships" id="2147483648" r:id="R27e68bc636584ffa"/>
+    <p:sldMasterId xmlns:r="http://schemas.openxmlformats.org/officeDocument/2006/relationships" id="2147483648" r:id="R847cfad5246c4b9b"/>
   </p:sldMasterIdLst>
   <p:notesMasterIdLst>
-    <p:notesMasterId xmlns:r="http://schemas.openxmlformats.org/officeDocument/2006/relationships" r:id="R070cc2316d4142d9"/>
+    <p:notesMasterId xmlns:r="http://schemas.openxmlformats.org/officeDocument/2006/relationships" r:id="Rcc162f985a6d4996"/>
   </p:notesMasterIdLst>
   <p:sldIdLst>
-    <p:sldId xmlns:r="http://schemas.openxmlformats.org/officeDocument/2006/relationships" id="256" r:id="Re5f8cc66c03943d2"/>
-    <p:sldId xmlns:r="http://schemas.openxmlformats.org/officeDocument/2006/relationships" id="257" r:id="Refcee637036d4525"/>
-    <p:sldId xmlns:r="http://schemas.openxmlformats.org/officeDocument/2006/relationships" id="258" r:id="Rbf3b45e82e184f42"/>
-    <p:sldId xmlns:r="http://schemas.openxmlformats.org/officeDocument/2006/relationships" id="259" r:id="R44afa5663e0d4f35"/>
-    <p:sldId xmlns:r="http://schemas.openxmlformats.org/officeDocument/2006/relationships" id="260" r:id="Rd0e294ac99fe4c82"/>
-    <p:sldId xmlns:r="http://schemas.openxmlformats.org/officeDocument/2006/relationships" id="261" r:id="Rdc08e578800a4bd3"/>
-    <p:sldId xmlns:r="http://schemas.openxmlformats.org/officeDocument/2006/relationships" id="262" r:id="Rc42f163a0a6c43a3"/>
-    <p:sldId xmlns:r="http://schemas.openxmlformats.org/officeDocument/2006/relationships" id="263" r:id="R98ee1c0f0d524e4f"/>
-    <p:sldId xmlns:r="http://schemas.openxmlformats.org/officeDocument/2006/relationships" id="264" r:id="R1d23822c36ce466e"/>
+    <p:sldId xmlns:r="http://schemas.openxmlformats.org/officeDocument/2006/relationships" id="256" r:id="R08756b6923cc48e1"/>
+    <p:sldId xmlns:r="http://schemas.openxmlformats.org/officeDocument/2006/relationships" id="257" r:id="R5a86457b41e043f8"/>
+    <p:sldId xmlns:r="http://schemas.openxmlformats.org/officeDocument/2006/relationships" id="258" r:id="R6aa4b53516fb4fff"/>
+    <p:sldId xmlns:r="http://schemas.openxmlformats.org/officeDocument/2006/relationships" id="259" r:id="R4413ecd429324071"/>
+    <p:sldId xmlns:r="http://schemas.openxmlformats.org/officeDocument/2006/relationships" id="260" r:id="Rda82ba3a634a4c6f"/>
+    <p:sldId xmlns:r="http://schemas.openxmlformats.org/officeDocument/2006/relationships" id="261" r:id="Re418ea3fd90f4cfa"/>
+    <p:sldId xmlns:r="http://schemas.openxmlformats.org/officeDocument/2006/relationships" id="262" r:id="Rea2db6ec86bd47e1"/>
+    <p:sldId xmlns:r="http://schemas.openxmlformats.org/officeDocument/2006/relationships" id="263" r:id="Rab93d253f0b64b31"/>
+    <p:sldId xmlns:r="http://schemas.openxmlformats.org/officeDocument/2006/relationships" id="264" r:id="R797f6266a9254592"/>
   </p:sldIdLst>
   <p:sldSz cx="12192000" cy="6858000"/>
   <p:notesSz cx="6858000" cy="9144000"/>
   <p:embeddedFontLst>
     <p:embeddedFont>
       <p:font typeface="JetBrains Mono"/>
-      <p:regular xmlns:r="http://schemas.openxmlformats.org/officeDocument/2006/relationships" r:id="R338eeacfe1784df4"/>
+      <p:regular xmlns:r="http://schemas.openxmlformats.org/officeDocument/2006/relationships" r:id="Rd59f754eb89b4880"/>
     </p:embeddedFont>
   </p:embeddedFontLst>
 </p:presentation>
@@ -1071,7 +1071,7 @@
           <p:nvPr/>
         </p:nvPicPr>
         <p:blipFill rotWithShape="1">
-          <a:blip xmlns:r="http://schemas.openxmlformats.org/officeDocument/2006/relationships" xmlns:a="http://schemas.openxmlformats.org/drawingml/2006/main" r:embed="R80cbdca53b764c75"/>
+          <a:blip xmlns:r="http://schemas.openxmlformats.org/officeDocument/2006/relationships" xmlns:a="http://schemas.openxmlformats.org/drawingml/2006/main" r:embed="Ra7e618d104f04603"/>
           <a:stretch xmlns:a="http://schemas.openxmlformats.org/drawingml/2006/main"/>
         </p:blipFill>
         <p:spPr>
@@ -1451,7 +1451,7 @@
           <p:nvPr/>
         </p:nvPicPr>
         <p:blipFill rotWithShape="1">
-          <a:blip xmlns:r="http://schemas.openxmlformats.org/officeDocument/2006/relationships" xmlns:a="http://schemas.openxmlformats.org/drawingml/2006/main" r:embed="R21e32182d17141c3">
+          <a:blip xmlns:r="http://schemas.openxmlformats.org/officeDocument/2006/relationships" xmlns:a="http://schemas.openxmlformats.org/drawingml/2006/main" r:embed="Rd8872767bf924746">
             <a:alphaModFix amt="28000"/>
           </a:blip>
           <a:stretch xmlns:a="http://schemas.openxmlformats.org/drawingml/2006/main"/>
@@ -1664,7 +1664,7 @@
           <p:nvPr/>
         </p:nvPicPr>
         <p:blipFill rotWithShape="1">
-          <a:blip xmlns:r="http://schemas.openxmlformats.org/officeDocument/2006/relationships" xmlns:a="http://schemas.openxmlformats.org/drawingml/2006/main" r:embed="Re138bd3aeee74924">
+          <a:blip xmlns:r="http://schemas.openxmlformats.org/officeDocument/2006/relationships" xmlns:a="http://schemas.openxmlformats.org/drawingml/2006/main" r:embed="R6e890d7f3a95449f">
             <a:alphaModFix amt="28000"/>
           </a:blip>
           <a:stretch xmlns:a="http://schemas.openxmlformats.org/drawingml/2006/main"/>
@@ -1899,7 +1899,7 @@
           <p:nvPr/>
         </p:nvPicPr>
         <p:blipFill rotWithShape="1">
-          <a:blip xmlns:r="http://schemas.openxmlformats.org/officeDocument/2006/relationships" xmlns:a="http://schemas.openxmlformats.org/drawingml/2006/main" r:embed="Rbd1d9267879d42c2">
+          <a:blip xmlns:r="http://schemas.openxmlformats.org/officeDocument/2006/relationships" xmlns:a="http://schemas.openxmlformats.org/drawingml/2006/main" r:embed="R5a18bb0b28dc481d">
             <a:alphaModFix amt="28000"/>
           </a:blip>
           <a:stretch xmlns:a="http://schemas.openxmlformats.org/drawingml/2006/main"/>
@@ -2176,7 +2176,7 @@
           <p:nvPr/>
         </p:nvPicPr>
         <p:blipFill rotWithShape="1">
-          <a:blip xmlns:r="http://schemas.openxmlformats.org/officeDocument/2006/relationships" xmlns:a="http://schemas.openxmlformats.org/drawingml/2006/main" r:embed="Re403a1a6cacb4489">
+          <a:blip xmlns:r="http://schemas.openxmlformats.org/officeDocument/2006/relationships" xmlns:a="http://schemas.openxmlformats.org/drawingml/2006/main" r:embed="Rf0abb86f3f4e4954">
             <a:alphaModFix amt="28000"/>
           </a:blip>
           <a:stretch xmlns:a="http://schemas.openxmlformats.org/drawingml/2006/main"/>
@@ -2451,7 +2451,7 @@
           <p:nvPr/>
         </p:nvPicPr>
         <p:blipFill rotWithShape="1">
-          <a:blip xmlns:r="http://schemas.openxmlformats.org/officeDocument/2006/relationships" xmlns:a="http://schemas.openxmlformats.org/drawingml/2006/main" r:embed="Rc1e0cf80e1324ffb">
+          <a:blip xmlns:r="http://schemas.openxmlformats.org/officeDocument/2006/relationships" xmlns:a="http://schemas.openxmlformats.org/drawingml/2006/main" r:embed="Ra3440743a5194b11">
             <a:alphaModFix amt="28000"/>
           </a:blip>
           <a:stretch xmlns:a="http://schemas.openxmlformats.org/drawingml/2006/main"/>
@@ -2875,7 +2875,7 @@
           <p:nvPr/>
         </p:nvPicPr>
         <p:blipFill rotWithShape="1">
-          <a:blip xmlns:r="http://schemas.openxmlformats.org/officeDocument/2006/relationships" xmlns:a="http://schemas.openxmlformats.org/drawingml/2006/main" r:embed="R058c87e32a924600">
+          <a:blip xmlns:r="http://schemas.openxmlformats.org/officeDocument/2006/relationships" xmlns:a="http://schemas.openxmlformats.org/drawingml/2006/main" r:embed="R11b6e2229e344052">
             <a:alphaModFix amt="28000"/>
           </a:blip>
           <a:stretch xmlns:a="http://schemas.openxmlformats.org/drawingml/2006/main"/>
@@ -3016,7 +3016,7 @@
           <p:nvPr/>
         </p:nvPicPr>
         <p:blipFill rotWithShape="1">
-          <a:blip xmlns:r="http://schemas.openxmlformats.org/officeDocument/2006/relationships" xmlns:a="http://schemas.openxmlformats.org/drawingml/2006/main" r:embed="R3bd786349a734714">
+          <a:blip xmlns:r="http://schemas.openxmlformats.org/officeDocument/2006/relationships" xmlns:a="http://schemas.openxmlformats.org/drawingml/2006/main" r:embed="Rc99725457eb34a27">
             <a:alphaModFix amt="28000"/>
           </a:blip>
           <a:stretch xmlns:a="http://schemas.openxmlformats.org/drawingml/2006/main"/>
@@ -3130,7 +3130,7 @@
           <p:nvPr/>
         </p:nvPicPr>
         <p:blipFill rotWithShape="1">
-          <a:blip xmlns:r="http://schemas.openxmlformats.org/officeDocument/2006/relationships" xmlns:a="http://schemas.openxmlformats.org/drawingml/2006/main" r:embed="R3c213a54ada945b1">
+          <a:blip xmlns:r="http://schemas.openxmlformats.org/officeDocument/2006/relationships" xmlns:a="http://schemas.openxmlformats.org/drawingml/2006/main" r:embed="R3e196c6c181b4440">
             <a:alphaModFix amt="28000"/>
           </a:blip>
           <a:stretch xmlns:a="http://schemas.openxmlformats.org/drawingml/2006/main"/>
@@ -3457,7 +3457,7 @@
           <p:nvPr/>
         </p:nvPicPr>
         <p:blipFill rotWithShape="1">
-          <a:blip xmlns:r="http://schemas.openxmlformats.org/officeDocument/2006/relationships" xmlns:a="http://schemas.openxmlformats.org/drawingml/2006/main" r:embed="R74b18903c1e04f64">
+          <a:blip xmlns:r="http://schemas.openxmlformats.org/officeDocument/2006/relationships" xmlns:a="http://schemas.openxmlformats.org/drawingml/2006/main" r:embed="R85971f6eae834923">
             <a:alphaModFix amt="28000"/>
           </a:blip>
           <a:stretch xmlns:a="http://schemas.openxmlformats.org/drawingml/2006/main"/>
@@ -3745,7 +3745,7 @@
           <p:nvPr/>
         </p:nvPicPr>
         <p:blipFill rotWithShape="1">
-          <a:blip xmlns:r="http://schemas.openxmlformats.org/officeDocument/2006/relationships" xmlns:a="http://schemas.openxmlformats.org/drawingml/2006/main" r:embed="R51ccb7aad681468d">
+          <a:blip xmlns:r="http://schemas.openxmlformats.org/officeDocument/2006/relationships" xmlns:a="http://schemas.openxmlformats.org/drawingml/2006/main" r:embed="R2230015724e146d7">
             <a:alphaModFix amt="28000"/>
           </a:blip>
           <a:stretch xmlns:a="http://schemas.openxmlformats.org/drawingml/2006/main"/>
@@ -3982,17 +3982,17 @@
   </p:cSld>
   <p:clrMap bg1="lt1" tx1="dk1" bg2="lt2" tx2="dk2" accent1="accent1" accent2="accent2" accent3="accent3" accent4="accent4" accent5="accent5" accent6="accent6" hlink="hlink" folHlink="folHlink"/>
   <p:sldLayoutIdLst>
-    <p:sldLayoutId xmlns:r="http://schemas.openxmlformats.org/officeDocument/2006/relationships" id="2147483649" r:id="Rede20f4d32ea463f"/>
-    <p:sldLayoutId xmlns:r="http://schemas.openxmlformats.org/officeDocument/2006/relationships" id="2147483650" r:id="R190a0aa3a7394aef"/>
-    <p:sldLayoutId xmlns:r="http://schemas.openxmlformats.org/officeDocument/2006/relationships" id="2147483651" r:id="R3f33fd8e18f440a4"/>
-    <p:sldLayoutId xmlns:r="http://schemas.openxmlformats.org/officeDocument/2006/relationships" id="2147483652" r:id="R9b3659f110da4b5e"/>
-    <p:sldLayoutId xmlns:r="http://schemas.openxmlformats.org/officeDocument/2006/relationships" id="2147483653" r:id="R2876900e0b2c42ef"/>
-    <p:sldLayoutId xmlns:r="http://schemas.openxmlformats.org/officeDocument/2006/relationships" id="2147483654" r:id="R531cfd0279354f12"/>
-    <p:sldLayoutId xmlns:r="http://schemas.openxmlformats.org/officeDocument/2006/relationships" id="2147483655" r:id="Rc1cc6bbadec64d94"/>
-    <p:sldLayoutId xmlns:r="http://schemas.openxmlformats.org/officeDocument/2006/relationships" id="2147483656" r:id="R0c9e2a1f551d427e"/>
-    <p:sldLayoutId xmlns:r="http://schemas.openxmlformats.org/officeDocument/2006/relationships" id="2147483657" r:id="Rd9bb57cc775342d2"/>
-    <p:sldLayoutId xmlns:r="http://schemas.openxmlformats.org/officeDocument/2006/relationships" id="2147483658" r:id="R739133b1c18c4e5d"/>
-    <p:sldLayoutId xmlns:r="http://schemas.openxmlformats.org/officeDocument/2006/relationships" id="2147483659" r:id="R643deaa3e2d94194"/>
+    <p:sldLayoutId xmlns:r="http://schemas.openxmlformats.org/officeDocument/2006/relationships" id="2147483649" r:id="R90637fba2edd4fd6"/>
+    <p:sldLayoutId xmlns:r="http://schemas.openxmlformats.org/officeDocument/2006/relationships" id="2147483650" r:id="R409fd0a7e7704ff7"/>
+    <p:sldLayoutId xmlns:r="http://schemas.openxmlformats.org/officeDocument/2006/relationships" id="2147483651" r:id="Rd9744784a7604327"/>
+    <p:sldLayoutId xmlns:r="http://schemas.openxmlformats.org/officeDocument/2006/relationships" id="2147483652" r:id="R432d5391b3e3455f"/>
+    <p:sldLayoutId xmlns:r="http://schemas.openxmlformats.org/officeDocument/2006/relationships" id="2147483653" r:id="R2378da32fae345ac"/>
+    <p:sldLayoutId xmlns:r="http://schemas.openxmlformats.org/officeDocument/2006/relationships" id="2147483654" r:id="R2d4b4d5943524542"/>
+    <p:sldLayoutId xmlns:r="http://schemas.openxmlformats.org/officeDocument/2006/relationships" id="2147483655" r:id="R6b37043697724660"/>
+    <p:sldLayoutId xmlns:r="http://schemas.openxmlformats.org/officeDocument/2006/relationships" id="2147483656" r:id="Rac18ed7cc23a43be"/>
+    <p:sldLayoutId xmlns:r="http://schemas.openxmlformats.org/officeDocument/2006/relationships" id="2147483657" r:id="Ra058937ce2314286"/>
+    <p:sldLayoutId xmlns:r="http://schemas.openxmlformats.org/officeDocument/2006/relationships" id="2147483658" r:id="R8a8a6993a22749bc"/>
+    <p:sldLayoutId xmlns:r="http://schemas.openxmlformats.org/officeDocument/2006/relationships" id="2147483659" r:id="R0124b09f64904dbc"/>
   </p:sldLayoutIdLst>
   <p:hf hdr="0" ftr="0" dt="0"/>
   <p:txStyles>
@@ -7051,18 +7051,21 @@
                 <a:ea typeface="Calibri"/>
                 <a:cs typeface="Calibri"/>
               </a:rPr>
-              <a:t>Change </a:t>
-            </a:r>
-            <a:r>
-              <a:rPr sz="2400" b="0">
-                <a:solidFill>
-                  <a:srgbClr val="1750EB"/>
-                </a:solidFill>
-                <a:latin typeface="JetBrains Mono"/>
-                <a:ea typeface="JetBrains Mono"/>
-                <a:cs typeface="JetBrains Mono"/>
-              </a:rPr>
-              <a:t>range()</a:t>
+              <a:t>Change the example so it also asks how many lines to show and stores the whole number in </a:t>
+            </a:r>
+            <a:r>
+              <a:rPr sz="2050" b="0">
+                <a:solidFill>
+                  <a:srgbClr val="6A1B9A"/>
+                </a:solidFill>
+                <a:highlight>
+                  <a:srgbClr val="ECEAF4"/>
+                </a:highlight>
+                <a:latin typeface="JetBrains Mono"/>
+                <a:ea typeface="JetBrains Mono"/>
+                <a:cs typeface="JetBrains Mono"/>
+              </a:rPr>
+              <a:t> lines </a:t>
             </a:r>
             <a:r>
               <a:rPr sz="2400" b="0">
@@ -7073,18 +7076,21 @@
                 <a:ea typeface="Calibri"/>
                 <a:cs typeface="Calibri"/>
               </a:rPr>
-              <a:t> so [count] uses the numbers 1 through 10. For the input 4, the first line must be </a:t>
-            </a:r>
-            <a:r>
-              <a:rPr sz="2400" b="0">
-                <a:solidFill>
-                  <a:srgbClr val="067D17"/>
-                </a:solidFill>
-                <a:latin typeface="JetBrains Mono"/>
-                <a:ea typeface="JetBrains Mono"/>
-                <a:cs typeface="JetBrains Mono"/>
-              </a:rPr>
-              <a:t>"4 x 1 = 4"</a:t>
+              <a:t>. Use </a:t>
+            </a:r>
+            <a:r>
+              <a:rPr sz="2050" b="0">
+                <a:solidFill>
+                  <a:srgbClr val="6A1B9A"/>
+                </a:solidFill>
+                <a:highlight>
+                  <a:srgbClr val="ECEAF4"/>
+                </a:highlight>
+                <a:latin typeface="JetBrains Mono"/>
+                <a:ea typeface="JetBrains Mono"/>
+                <a:cs typeface="JetBrains Mono"/>
+              </a:rPr>
+              <a:t> lines </a:t>
             </a:r>
             <a:r>
               <a:rPr sz="2400" b="0">
@@ -7095,10 +7101,57 @@
                 <a:ea typeface="Calibri"/>
                 <a:cs typeface="Calibri"/>
               </a:rPr>
-              <a:t> and the last line must be </a:t>
+              <a:t> in </a:t>
+            </a:r>
+            <a:r>
+              <a:rPr sz="2050" b="0">
+                <a:solidFill>
+                  <a:srgbClr val="1750EB"/>
+                </a:solidFill>
+                <a:latin typeface="JetBrains Mono"/>
+                <a:ea typeface="JetBrains Mono"/>
+                <a:cs typeface="JetBrains Mono"/>
+              </a:rPr>
+              <a:t>range()</a:t>
             </a:r>
             <a:r>
               <a:rPr sz="2400" b="0">
+                <a:solidFill>
+                  <a:srgbClr val="080808"/>
+                </a:solidFill>
+                <a:latin typeface="Calibri"/>
+                <a:ea typeface="Calibri"/>
+                <a:cs typeface="Calibri"/>
+              </a:rPr>
+              <a:t> so the table runs from 1 up to </a:t>
+            </a:r>
+            <a:r>
+              <a:rPr sz="2050" b="0">
+                <a:solidFill>
+                  <a:srgbClr val="6A1B9A"/>
+                </a:solidFill>
+                <a:highlight>
+                  <a:srgbClr val="ECEAF4"/>
+                </a:highlight>
+                <a:latin typeface="JetBrains Mono"/>
+                <a:ea typeface="JetBrains Mono"/>
+                <a:cs typeface="JetBrains Mono"/>
+              </a:rPr>
+              <a:t> lines </a:t>
+            </a:r>
+            <a:r>
+              <a:rPr sz="2400" b="0">
+                <a:solidFill>
+                  <a:srgbClr val="080808"/>
+                </a:solidFill>
+                <a:latin typeface="Calibri"/>
+                <a:ea typeface="Calibri"/>
+                <a:cs typeface="Calibri"/>
+              </a:rPr>
+              <a:t>. For example, table 4 with 10 lines ends with </a:t>
+            </a:r>
+            <a:r>
+              <a:rPr sz="2050" b="0">
                 <a:solidFill>
                   <a:srgbClr val="067D17"/>
                 </a:solidFill>
@@ -7732,18 +7785,21 @@
                 <a:ea typeface="Calibri"/>
                 <a:cs typeface="Calibri"/>
               </a:rPr>
-              <a:t>Ask which table line to start with and store the whole number in [start]. Use </a:t>
-            </a:r>
-            <a:r>
-              <a:rPr sz="2400" b="0">
-                <a:solidFill>
-                  <a:srgbClr val="1750EB"/>
-                </a:solidFill>
-                <a:latin typeface="JetBrains Mono"/>
-                <a:ea typeface="JetBrains Mono"/>
-                <a:cs typeface="JetBrains Mono"/>
-              </a:rPr>
-              <a:t>range()</a:t>
+              <a:t>Extend the example so it asks for a starting multiplier and stores it in </a:t>
+            </a:r>
+            <a:r>
+              <a:rPr sz="2050" b="0">
+                <a:solidFill>
+                  <a:srgbClr val="6A1B9A"/>
+                </a:solidFill>
+                <a:highlight>
+                  <a:srgbClr val="ECEAF4"/>
+                </a:highlight>
+                <a:latin typeface="JetBrains Mono"/>
+                <a:ea typeface="JetBrains Mono"/>
+                <a:cs typeface="JetBrains Mono"/>
+              </a:rPr>
+              <a:t> start </a:t>
             </a:r>
             <a:r>
               <a:rPr sz="2400" b="0">
@@ -7754,18 +7810,18 @@
                 <a:ea typeface="Calibri"/>
                 <a:cs typeface="Calibri"/>
               </a:rPr>
-              <a:t> to display five lines beginning with [start]. For table 3 and start 4, display lines from </a:t>
-            </a:r>
-            <a:r>
-              <a:rPr sz="2400" b="0">
-                <a:solidFill>
-                  <a:srgbClr val="067D17"/>
-                </a:solidFill>
-                <a:latin typeface="JetBrains Mono"/>
-                <a:ea typeface="JetBrains Mono"/>
-                <a:cs typeface="JetBrains Mono"/>
-              </a:rPr>
-              <a:t>"3 x 4 = 12"</a:t>
+              <a:t>. Change </a:t>
+            </a:r>
+            <a:r>
+              <a:rPr sz="2050" b="0">
+                <a:solidFill>
+                  <a:srgbClr val="1750EB"/>
+                </a:solidFill>
+                <a:latin typeface="JetBrains Mono"/>
+                <a:ea typeface="JetBrains Mono"/>
+                <a:cs typeface="JetBrains Mono"/>
+              </a:rPr>
+              <a:t>range()</a:t>
             </a:r>
             <a:r>
               <a:rPr sz="2400" b="0">
@@ -7776,10 +7832,57 @@
                 <a:ea typeface="Calibri"/>
                 <a:cs typeface="Calibri"/>
               </a:rPr>
-              <a:t> through </a:t>
+              <a:t> so it displays five lines beginning at </a:t>
+            </a:r>
+            <a:r>
+              <a:rPr sz="2050" b="0">
+                <a:solidFill>
+                  <a:srgbClr val="6A1B9A"/>
+                </a:solidFill>
+                <a:highlight>
+                  <a:srgbClr val="ECEAF4"/>
+                </a:highlight>
+                <a:latin typeface="JetBrains Mono"/>
+                <a:ea typeface="JetBrains Mono"/>
+                <a:cs typeface="JetBrains Mono"/>
+              </a:rPr>
+              <a:t> start </a:t>
             </a:r>
             <a:r>
               <a:rPr sz="2400" b="0">
+                <a:solidFill>
+                  <a:srgbClr val="080808"/>
+                </a:solidFill>
+                <a:latin typeface="Calibri"/>
+                <a:ea typeface="Calibri"/>
+                <a:cs typeface="Calibri"/>
+              </a:rPr>
+              <a:t>. For example, table 3 starting at 4 displays </a:t>
+            </a:r>
+            <a:r>
+              <a:rPr sz="2050" b="0">
+                <a:solidFill>
+                  <a:srgbClr val="067D17"/>
+                </a:solidFill>
+                <a:latin typeface="JetBrains Mono"/>
+                <a:ea typeface="JetBrains Mono"/>
+                <a:cs typeface="JetBrains Mono"/>
+              </a:rPr>
+              <a:t>"3 x 4 = 12"</a:t>
+            </a:r>
+            <a:r>
+              <a:rPr sz="2400" b="0">
+                <a:solidFill>
+                  <a:srgbClr val="080808"/>
+                </a:solidFill>
+                <a:latin typeface="Calibri"/>
+                <a:ea typeface="Calibri"/>
+                <a:cs typeface="Calibri"/>
+              </a:rPr>
+              <a:t> to </a:t>
+            </a:r>
+            <a:r>
+              <a:rPr sz="2050" b="0">
                 <a:solidFill>
                   <a:srgbClr val="067D17"/>
                 </a:solidFill>
@@ -8413,18 +8516,21 @@
                 <a:ea typeface="Calibri"/>
                 <a:cs typeface="Calibri"/>
               </a:rPr>
-              <a:t>Create a three-line announcement. Ask for a short message, then use a </a:t>
-            </a:r>
-            <a:r>
-              <a:rPr sz="2400" b="0">
-                <a:solidFill>
-                  <a:srgbClr val="1750EB"/>
-                </a:solidFill>
-                <a:latin typeface="JetBrains Mono"/>
-                <a:ea typeface="JetBrains Mono"/>
-                <a:cs typeface="JetBrains Mono"/>
-              </a:rPr>
-              <a:t>for</a:t>
+              <a:t>Create a savings planner. Ask for a starting amount and a weekly saving as whole numbers, and store the starting amount in </a:t>
+            </a:r>
+            <a:r>
+              <a:rPr sz="2050" b="0">
+                <a:solidFill>
+                  <a:srgbClr val="6A1B9A"/>
+                </a:solidFill>
+                <a:highlight>
+                  <a:srgbClr val="ECEAF4"/>
+                </a:highlight>
+                <a:latin typeface="JetBrains Mono"/>
+                <a:ea typeface="JetBrains Mono"/>
+                <a:cs typeface="JetBrains Mono"/>
+              </a:rPr>
+              <a:t> total </a:t>
             </a:r>
             <a:r>
               <a:rPr sz="2400" b="0">
@@ -8435,10 +8541,10 @@
                 <a:ea typeface="Calibri"/>
                 <a:cs typeface="Calibri"/>
               </a:rPr>
-              <a:t> loop and </a:t>
-            </a:r>
-            <a:r>
-              <a:rPr sz="2400" b="0">
+              <a:t>. Use a </a:t>
+            </a:r>
+            <a:r>
+              <a:rPr sz="2050" b="0">
                 <a:solidFill>
                   <a:srgbClr val="1750EB"/>
                 </a:solidFill>
@@ -8446,7 +8552,7 @@
                 <a:ea typeface="JetBrains Mono"/>
                 <a:cs typeface="JetBrains Mono"/>
               </a:rPr>
-              <a:t>range()</a:t>
+              <a:t>for</a:t>
             </a:r>
             <a:r>
               <a:rPr sz="2400" b="0">
@@ -8457,18 +8563,18 @@
                 <a:ea typeface="Calibri"/>
                 <a:cs typeface="Calibri"/>
               </a:rPr>
-              <a:t> to display </a:t>
-            </a:r>
-            <a:r>
-              <a:rPr sz="2400" b="0">
-                <a:solidFill>
-                  <a:srgbClr val="067D17"/>
-                </a:solidFill>
-                <a:latin typeface="JetBrains Mono"/>
-                <a:ea typeface="JetBrains Mono"/>
-                <a:cs typeface="JetBrains Mono"/>
-              </a:rPr>
-              <a:t>"1 [message]"</a:t>
+              <a:t> loop and </a:t>
+            </a:r>
+            <a:r>
+              <a:rPr sz="2050" b="0">
+                <a:solidFill>
+                  <a:srgbClr val="1750EB"/>
+                </a:solidFill>
+                <a:latin typeface="JetBrains Mono"/>
+                <a:ea typeface="JetBrains Mono"/>
+                <a:cs typeface="JetBrains Mono"/>
+              </a:rPr>
+              <a:t>range()</a:t>
             </a:r>
             <a:r>
               <a:rPr sz="2400" b="0">
@@ -8479,18 +8585,21 @@
                 <a:ea typeface="Calibri"/>
                 <a:cs typeface="Calibri"/>
               </a:rPr>
-              <a:t>, </a:t>
-            </a:r>
-            <a:r>
-              <a:rPr sz="2400" b="0">
-                <a:solidFill>
-                  <a:srgbClr val="067D17"/>
-                </a:solidFill>
-                <a:latin typeface="JetBrains Mono"/>
-                <a:ea typeface="JetBrains Mono"/>
-                <a:cs typeface="JetBrains Mono"/>
-              </a:rPr>
-              <a:t>"2 [message]"</a:t>
+              <a:t> to add the saving to </a:t>
+            </a:r>
+            <a:r>
+              <a:rPr sz="2050" b="0">
+                <a:solidFill>
+                  <a:srgbClr val="6A1B9A"/>
+                </a:solidFill>
+                <a:highlight>
+                  <a:srgbClr val="ECEAF4"/>
+                </a:highlight>
+                <a:latin typeface="JetBrains Mono"/>
+                <a:ea typeface="JetBrains Mono"/>
+                <a:cs typeface="JetBrains Mono"/>
+              </a:rPr>
+              <a:t> total </a:t>
             </a:r>
             <a:r>
               <a:rPr sz="2400" b="0">
@@ -8501,10 +8610,10 @@
                 <a:ea typeface="Calibri"/>
                 <a:cs typeface="Calibri"/>
               </a:rPr>
-              <a:t> and </a:t>
-            </a:r>
-            <a:r>
-              <a:rPr sz="2400" b="0">
+              <a:t> each week and display it, such as </a:t>
+            </a:r>
+            <a:r>
+              <a:rPr sz="2050" b="0">
                 <a:solidFill>
                   <a:srgbClr val="067D17"/>
                 </a:solidFill>
@@ -8512,7 +8621,7 @@
                 <a:ea typeface="JetBrains Mono"/>
                 <a:cs typeface="JetBrains Mono"/>
               </a:rPr>
-              <a:t>"3 [message]"</a:t>
+              <a:t>"Week 1 total: 15"</a:t>
             </a:r>
             <a:r>
               <a:rPr sz="2400" b="0">
@@ -8523,29 +8632,7 @@
                 <a:ea typeface="Calibri"/>
                 <a:cs typeface="Calibri"/>
               </a:rPr>
-              <a:t>. Try it with </a:t>
-            </a:r>
-            <a:r>
-              <a:rPr sz="2400" b="0">
-                <a:solidFill>
-                  <a:srgbClr val="067D17"/>
-                </a:solidFill>
-                <a:latin typeface="JetBrains Mono"/>
-                <a:ea typeface="JetBrains Mono"/>
-                <a:cs typeface="JetBrains Mono"/>
-              </a:rPr>
-              <a:t>"Ready"</a:t>
-            </a:r>
-            <a:r>
-              <a:rPr sz="2400" b="0">
-                <a:solidFill>
-                  <a:srgbClr val="080808"/>
-                </a:solidFill>
-                <a:latin typeface="Calibri"/>
-                <a:ea typeface="Calibri"/>
-                <a:cs typeface="Calibri"/>
-              </a:rPr>
-              <a:t>.</a:t>
+              <a:t>. Show weeks 1 to 4.</a:t>
             </a:r>
           </a:p>
         </p:txBody>

--- a/Mapped Curriculum Lessons/Grade 6/Lesson 08 - Counted Loops/Counted Loops - Slides.pptx
+++ b/Mapped Curriculum Lessons/Grade 6/Lesson 08 - Counted Loops/Counted Loops - Slides.pptx
@@ -2,28 +2,28 @@
 <file path=ppt/presentation.xml><?xml version="1.0" encoding="utf-8"?>
 <p:presentation xmlns:p="http://schemas.openxmlformats.org/presentationml/2006/main" embedTrueTypeFonts="1" saveSubsetFonts="0">
   <p:sldMasterIdLst>
-    <p:sldMasterId xmlns:r="http://schemas.openxmlformats.org/officeDocument/2006/relationships" id="2147483648" r:id="R847cfad5246c4b9b"/>
+    <p:sldMasterId xmlns:r="http://schemas.openxmlformats.org/officeDocument/2006/relationships" id="2147483648" r:id="R4fac9019b78847ff"/>
   </p:sldMasterIdLst>
   <p:notesMasterIdLst>
-    <p:notesMasterId xmlns:r="http://schemas.openxmlformats.org/officeDocument/2006/relationships" r:id="Rcc162f985a6d4996"/>
+    <p:notesMasterId xmlns:r="http://schemas.openxmlformats.org/officeDocument/2006/relationships" r:id="Rda3b792c09574f2c"/>
   </p:notesMasterIdLst>
   <p:sldIdLst>
-    <p:sldId xmlns:r="http://schemas.openxmlformats.org/officeDocument/2006/relationships" id="256" r:id="R08756b6923cc48e1"/>
-    <p:sldId xmlns:r="http://schemas.openxmlformats.org/officeDocument/2006/relationships" id="257" r:id="R5a86457b41e043f8"/>
-    <p:sldId xmlns:r="http://schemas.openxmlformats.org/officeDocument/2006/relationships" id="258" r:id="R6aa4b53516fb4fff"/>
-    <p:sldId xmlns:r="http://schemas.openxmlformats.org/officeDocument/2006/relationships" id="259" r:id="R4413ecd429324071"/>
-    <p:sldId xmlns:r="http://schemas.openxmlformats.org/officeDocument/2006/relationships" id="260" r:id="Rda82ba3a634a4c6f"/>
-    <p:sldId xmlns:r="http://schemas.openxmlformats.org/officeDocument/2006/relationships" id="261" r:id="Re418ea3fd90f4cfa"/>
-    <p:sldId xmlns:r="http://schemas.openxmlformats.org/officeDocument/2006/relationships" id="262" r:id="Rea2db6ec86bd47e1"/>
-    <p:sldId xmlns:r="http://schemas.openxmlformats.org/officeDocument/2006/relationships" id="263" r:id="Rab93d253f0b64b31"/>
-    <p:sldId xmlns:r="http://schemas.openxmlformats.org/officeDocument/2006/relationships" id="264" r:id="R797f6266a9254592"/>
+    <p:sldId xmlns:r="http://schemas.openxmlformats.org/officeDocument/2006/relationships" id="256" r:id="Rd40558d2821f40be"/>
+    <p:sldId xmlns:r="http://schemas.openxmlformats.org/officeDocument/2006/relationships" id="257" r:id="Re367a830824f40f3"/>
+    <p:sldId xmlns:r="http://schemas.openxmlformats.org/officeDocument/2006/relationships" id="258" r:id="R045eb1b94c8c421f"/>
+    <p:sldId xmlns:r="http://schemas.openxmlformats.org/officeDocument/2006/relationships" id="259" r:id="R73131abc52874430"/>
+    <p:sldId xmlns:r="http://schemas.openxmlformats.org/officeDocument/2006/relationships" id="260" r:id="R83310e3e234f4acd"/>
+    <p:sldId xmlns:r="http://schemas.openxmlformats.org/officeDocument/2006/relationships" id="261" r:id="R80c0a26c55c04aa8"/>
+    <p:sldId xmlns:r="http://schemas.openxmlformats.org/officeDocument/2006/relationships" id="262" r:id="R7a8a851e11ee4874"/>
+    <p:sldId xmlns:r="http://schemas.openxmlformats.org/officeDocument/2006/relationships" id="263" r:id="R5151ea2ab36c41c3"/>
+    <p:sldId xmlns:r="http://schemas.openxmlformats.org/officeDocument/2006/relationships" id="264" r:id="Rb949e3095ecf4db6"/>
   </p:sldIdLst>
   <p:sldSz cx="12192000" cy="6858000"/>
   <p:notesSz cx="6858000" cy="9144000"/>
   <p:embeddedFontLst>
     <p:embeddedFont>
       <p:font typeface="JetBrains Mono"/>
-      <p:regular xmlns:r="http://schemas.openxmlformats.org/officeDocument/2006/relationships" r:id="Rd59f754eb89b4880"/>
+      <p:regular xmlns:r="http://schemas.openxmlformats.org/officeDocument/2006/relationships" r:id="R294c18af080c4e2a"/>
     </p:embeddedFont>
   </p:embeddedFontLst>
 </p:presentation>
@@ -1071,7 +1071,7 @@
           <p:nvPr/>
         </p:nvPicPr>
         <p:blipFill rotWithShape="1">
-          <a:blip xmlns:r="http://schemas.openxmlformats.org/officeDocument/2006/relationships" xmlns:a="http://schemas.openxmlformats.org/drawingml/2006/main" r:embed="Ra7e618d104f04603"/>
+          <a:blip xmlns:r="http://schemas.openxmlformats.org/officeDocument/2006/relationships" xmlns:a="http://schemas.openxmlformats.org/drawingml/2006/main" r:embed="Ra59916810c754eab"/>
           <a:stretch xmlns:a="http://schemas.openxmlformats.org/drawingml/2006/main"/>
         </p:blipFill>
         <p:spPr>
@@ -1451,7 +1451,7 @@
           <p:nvPr/>
         </p:nvPicPr>
         <p:blipFill rotWithShape="1">
-          <a:blip xmlns:r="http://schemas.openxmlformats.org/officeDocument/2006/relationships" xmlns:a="http://schemas.openxmlformats.org/drawingml/2006/main" r:embed="Rd8872767bf924746">
+          <a:blip xmlns:r="http://schemas.openxmlformats.org/officeDocument/2006/relationships" xmlns:a="http://schemas.openxmlformats.org/drawingml/2006/main" r:embed="Rdbc5f72aac2648e8">
             <a:alphaModFix amt="28000"/>
           </a:blip>
           <a:stretch xmlns:a="http://schemas.openxmlformats.org/drawingml/2006/main"/>
@@ -1664,7 +1664,7 @@
           <p:nvPr/>
         </p:nvPicPr>
         <p:blipFill rotWithShape="1">
-          <a:blip xmlns:r="http://schemas.openxmlformats.org/officeDocument/2006/relationships" xmlns:a="http://schemas.openxmlformats.org/drawingml/2006/main" r:embed="R6e890d7f3a95449f">
+          <a:blip xmlns:r="http://schemas.openxmlformats.org/officeDocument/2006/relationships" xmlns:a="http://schemas.openxmlformats.org/drawingml/2006/main" r:embed="R147b54c8b69b4c07">
             <a:alphaModFix amt="28000"/>
           </a:blip>
           <a:stretch xmlns:a="http://schemas.openxmlformats.org/drawingml/2006/main"/>
@@ -1899,7 +1899,7 @@
           <p:nvPr/>
         </p:nvPicPr>
         <p:blipFill rotWithShape="1">
-          <a:blip xmlns:r="http://schemas.openxmlformats.org/officeDocument/2006/relationships" xmlns:a="http://schemas.openxmlformats.org/drawingml/2006/main" r:embed="R5a18bb0b28dc481d">
+          <a:blip xmlns:r="http://schemas.openxmlformats.org/officeDocument/2006/relationships" xmlns:a="http://schemas.openxmlformats.org/drawingml/2006/main" r:embed="R888d669baf534ba9">
             <a:alphaModFix amt="28000"/>
           </a:blip>
           <a:stretch xmlns:a="http://schemas.openxmlformats.org/drawingml/2006/main"/>
@@ -2176,7 +2176,7 @@
           <p:nvPr/>
         </p:nvPicPr>
         <p:blipFill rotWithShape="1">
-          <a:blip xmlns:r="http://schemas.openxmlformats.org/officeDocument/2006/relationships" xmlns:a="http://schemas.openxmlformats.org/drawingml/2006/main" r:embed="Rf0abb86f3f4e4954">
+          <a:blip xmlns:r="http://schemas.openxmlformats.org/officeDocument/2006/relationships" xmlns:a="http://schemas.openxmlformats.org/drawingml/2006/main" r:embed="Rfc22176018c84afc">
             <a:alphaModFix amt="28000"/>
           </a:blip>
           <a:stretch xmlns:a="http://schemas.openxmlformats.org/drawingml/2006/main"/>
@@ -2451,7 +2451,7 @@
           <p:nvPr/>
         </p:nvPicPr>
         <p:blipFill rotWithShape="1">
-          <a:blip xmlns:r="http://schemas.openxmlformats.org/officeDocument/2006/relationships" xmlns:a="http://schemas.openxmlformats.org/drawingml/2006/main" r:embed="Ra3440743a5194b11">
+          <a:blip xmlns:r="http://schemas.openxmlformats.org/officeDocument/2006/relationships" xmlns:a="http://schemas.openxmlformats.org/drawingml/2006/main" r:embed="Ra1fa088cf98740f2">
             <a:alphaModFix amt="28000"/>
           </a:blip>
           <a:stretch xmlns:a="http://schemas.openxmlformats.org/drawingml/2006/main"/>
@@ -2875,7 +2875,7 @@
           <p:nvPr/>
         </p:nvPicPr>
         <p:blipFill rotWithShape="1">
-          <a:blip xmlns:r="http://schemas.openxmlformats.org/officeDocument/2006/relationships" xmlns:a="http://schemas.openxmlformats.org/drawingml/2006/main" r:embed="R11b6e2229e344052">
+          <a:blip xmlns:r="http://schemas.openxmlformats.org/officeDocument/2006/relationships" xmlns:a="http://schemas.openxmlformats.org/drawingml/2006/main" r:embed="R03d363074b0a4997">
             <a:alphaModFix amt="28000"/>
           </a:blip>
           <a:stretch xmlns:a="http://schemas.openxmlformats.org/drawingml/2006/main"/>
@@ -3016,7 +3016,7 @@
           <p:nvPr/>
         </p:nvPicPr>
         <p:blipFill rotWithShape="1">
-          <a:blip xmlns:r="http://schemas.openxmlformats.org/officeDocument/2006/relationships" xmlns:a="http://schemas.openxmlformats.org/drawingml/2006/main" r:embed="Rc99725457eb34a27">
+          <a:blip xmlns:r="http://schemas.openxmlformats.org/officeDocument/2006/relationships" xmlns:a="http://schemas.openxmlformats.org/drawingml/2006/main" r:embed="Rfac1638cdabf456b">
             <a:alphaModFix amt="28000"/>
           </a:blip>
           <a:stretch xmlns:a="http://schemas.openxmlformats.org/drawingml/2006/main"/>
@@ -3130,7 +3130,7 @@
           <p:nvPr/>
         </p:nvPicPr>
         <p:blipFill rotWithShape="1">
-          <a:blip xmlns:r="http://schemas.openxmlformats.org/officeDocument/2006/relationships" xmlns:a="http://schemas.openxmlformats.org/drawingml/2006/main" r:embed="R3e196c6c181b4440">
+          <a:blip xmlns:r="http://schemas.openxmlformats.org/officeDocument/2006/relationships" xmlns:a="http://schemas.openxmlformats.org/drawingml/2006/main" r:embed="R4f587a7a70fe4ea8">
             <a:alphaModFix amt="28000"/>
           </a:blip>
           <a:stretch xmlns:a="http://schemas.openxmlformats.org/drawingml/2006/main"/>
@@ -3457,7 +3457,7 @@
           <p:nvPr/>
         </p:nvPicPr>
         <p:blipFill rotWithShape="1">
-          <a:blip xmlns:r="http://schemas.openxmlformats.org/officeDocument/2006/relationships" xmlns:a="http://schemas.openxmlformats.org/drawingml/2006/main" r:embed="R85971f6eae834923">
+          <a:blip xmlns:r="http://schemas.openxmlformats.org/officeDocument/2006/relationships" xmlns:a="http://schemas.openxmlformats.org/drawingml/2006/main" r:embed="R26de8a4724154d0b">
             <a:alphaModFix amt="28000"/>
           </a:blip>
           <a:stretch xmlns:a="http://schemas.openxmlformats.org/drawingml/2006/main"/>
@@ -3745,7 +3745,7 @@
           <p:nvPr/>
         </p:nvPicPr>
         <p:blipFill rotWithShape="1">
-          <a:blip xmlns:r="http://schemas.openxmlformats.org/officeDocument/2006/relationships" xmlns:a="http://schemas.openxmlformats.org/drawingml/2006/main" r:embed="R2230015724e146d7">
+          <a:blip xmlns:r="http://schemas.openxmlformats.org/officeDocument/2006/relationships" xmlns:a="http://schemas.openxmlformats.org/drawingml/2006/main" r:embed="R8c5c84af7688410e">
             <a:alphaModFix amt="28000"/>
           </a:blip>
           <a:stretch xmlns:a="http://schemas.openxmlformats.org/drawingml/2006/main"/>
@@ -3982,17 +3982,17 @@
   </p:cSld>
   <p:clrMap bg1="lt1" tx1="dk1" bg2="lt2" tx2="dk2" accent1="accent1" accent2="accent2" accent3="accent3" accent4="accent4" accent5="accent5" accent6="accent6" hlink="hlink" folHlink="folHlink"/>
   <p:sldLayoutIdLst>
-    <p:sldLayoutId xmlns:r="http://schemas.openxmlformats.org/officeDocument/2006/relationships" id="2147483649" r:id="R90637fba2edd4fd6"/>
-    <p:sldLayoutId xmlns:r="http://schemas.openxmlformats.org/officeDocument/2006/relationships" id="2147483650" r:id="R409fd0a7e7704ff7"/>
-    <p:sldLayoutId xmlns:r="http://schemas.openxmlformats.org/officeDocument/2006/relationships" id="2147483651" r:id="Rd9744784a7604327"/>
-    <p:sldLayoutId xmlns:r="http://schemas.openxmlformats.org/officeDocument/2006/relationships" id="2147483652" r:id="R432d5391b3e3455f"/>
-    <p:sldLayoutId xmlns:r="http://schemas.openxmlformats.org/officeDocument/2006/relationships" id="2147483653" r:id="R2378da32fae345ac"/>
-    <p:sldLayoutId xmlns:r="http://schemas.openxmlformats.org/officeDocument/2006/relationships" id="2147483654" r:id="R2d4b4d5943524542"/>
-    <p:sldLayoutId xmlns:r="http://schemas.openxmlformats.org/officeDocument/2006/relationships" id="2147483655" r:id="R6b37043697724660"/>
-    <p:sldLayoutId xmlns:r="http://schemas.openxmlformats.org/officeDocument/2006/relationships" id="2147483656" r:id="Rac18ed7cc23a43be"/>
-    <p:sldLayoutId xmlns:r="http://schemas.openxmlformats.org/officeDocument/2006/relationships" id="2147483657" r:id="Ra058937ce2314286"/>
-    <p:sldLayoutId xmlns:r="http://schemas.openxmlformats.org/officeDocument/2006/relationships" id="2147483658" r:id="R8a8a6993a22749bc"/>
-    <p:sldLayoutId xmlns:r="http://schemas.openxmlformats.org/officeDocument/2006/relationships" id="2147483659" r:id="R0124b09f64904dbc"/>
+    <p:sldLayoutId xmlns:r="http://schemas.openxmlformats.org/officeDocument/2006/relationships" id="2147483649" r:id="R9ab3850f7f6d4b9d"/>
+    <p:sldLayoutId xmlns:r="http://schemas.openxmlformats.org/officeDocument/2006/relationships" id="2147483650" r:id="R51c1f3981ad64e89"/>
+    <p:sldLayoutId xmlns:r="http://schemas.openxmlformats.org/officeDocument/2006/relationships" id="2147483651" r:id="Rc2e83e61fbb241cf"/>
+    <p:sldLayoutId xmlns:r="http://schemas.openxmlformats.org/officeDocument/2006/relationships" id="2147483652" r:id="Ra0b21e8fef53441a"/>
+    <p:sldLayoutId xmlns:r="http://schemas.openxmlformats.org/officeDocument/2006/relationships" id="2147483653" r:id="Ra0712c48793f424b"/>
+    <p:sldLayoutId xmlns:r="http://schemas.openxmlformats.org/officeDocument/2006/relationships" id="2147483654" r:id="R99c7de78caf04406"/>
+    <p:sldLayoutId xmlns:r="http://schemas.openxmlformats.org/officeDocument/2006/relationships" id="2147483655" r:id="Rdf091a9737b0460f"/>
+    <p:sldLayoutId xmlns:r="http://schemas.openxmlformats.org/officeDocument/2006/relationships" id="2147483656" r:id="R03f173d8f4f449b7"/>
+    <p:sldLayoutId xmlns:r="http://schemas.openxmlformats.org/officeDocument/2006/relationships" id="2147483657" r:id="R446343c237624c82"/>
+    <p:sldLayoutId xmlns:r="http://schemas.openxmlformats.org/officeDocument/2006/relationships" id="2147483658" r:id="R2da6c15705b64328"/>
+    <p:sldLayoutId xmlns:r="http://schemas.openxmlformats.org/officeDocument/2006/relationships" id="2147483659" r:id="Ra7b1da58a06e404e"/>
   </p:sldLayoutIdLst>
   <p:hf hdr="0" ftr="0" dt="0"/>
   <p:txStyles>
@@ -4983,7 +4983,7 @@
             <a:r>
               <a:rPr sz="2400">
                 <a:solidFill>
-                  <a:srgbClr val="1750EB"/>
+                  <a:srgbClr val="C45E00"/>
                 </a:solidFill>
                 <a:latin typeface="JetBrains Mono"/>
                 <a:ea typeface="JetBrains Mono"/>
@@ -5005,7 +5005,7 @@
             <a:r>
               <a:rPr sz="2400">
                 <a:solidFill>
-                  <a:srgbClr val="1750EB"/>
+                  <a:srgbClr val="C45E00"/>
                 </a:solidFill>
                 <a:latin typeface="JetBrains Mono"/>
                 <a:ea typeface="JetBrains Mono"/>
@@ -5504,7 +5504,7 @@
             <a:r>
               <a:rPr sz="2400">
                 <a:solidFill>
-                  <a:srgbClr val="1750EB"/>
+                  <a:srgbClr val="C45E00"/>
                 </a:solidFill>
                 <a:latin typeface="JetBrains Mono"/>
                 <a:ea typeface="JetBrains Mono"/>
@@ -5526,7 +5526,7 @@
             <a:r>
               <a:rPr sz="2400">
                 <a:solidFill>
-                  <a:srgbClr val="1750EB"/>
+                  <a:srgbClr val="C45E00"/>
                 </a:solidFill>
                 <a:latin typeface="JetBrains Mono"/>
                 <a:ea typeface="JetBrains Mono"/>
@@ -6025,7 +6025,7 @@
             <a:r>
               <a:rPr sz="2400">
                 <a:solidFill>
-                  <a:srgbClr val="1750EB"/>
+                  <a:srgbClr val="C45E00"/>
                 </a:solidFill>
                 <a:latin typeface="JetBrains Mono"/>
                 <a:ea typeface="JetBrains Mono"/>
@@ -6047,7 +6047,7 @@
             <a:r>
               <a:rPr sz="2400">
                 <a:solidFill>
-                  <a:srgbClr val="1750EB"/>
+                  <a:srgbClr val="C45E00"/>
                 </a:solidFill>
                 <a:latin typeface="JetBrains Mono"/>
                 <a:ea typeface="JetBrains Mono"/>
@@ -6799,7 +6799,7 @@
             <a:r>
               <a:rPr sz="1600">
                 <a:solidFill>
-                  <a:srgbClr val="1750EB"/>
+                  <a:srgbClr val="C45E00"/>
                 </a:solidFill>
                 <a:latin typeface="JetBrains Mono"/>
                 <a:ea typeface="JetBrains Mono"/>
@@ -6821,7 +6821,7 @@
             <a:r>
               <a:rPr sz="1600">
                 <a:solidFill>
-                  <a:srgbClr val="1750EB"/>
+                  <a:srgbClr val="C45E00"/>
                 </a:solidFill>
                 <a:latin typeface="JetBrains Mono"/>
                 <a:ea typeface="JetBrains Mono"/>
@@ -7533,7 +7533,7 @@
             <a:r>
               <a:rPr sz="1600">
                 <a:solidFill>
-                  <a:srgbClr val="1750EB"/>
+                  <a:srgbClr val="C45E00"/>
                 </a:solidFill>
                 <a:latin typeface="JetBrains Mono"/>
                 <a:ea typeface="JetBrains Mono"/>
@@ -7555,7 +7555,7 @@
             <a:r>
               <a:rPr sz="1600">
                 <a:solidFill>
-                  <a:srgbClr val="1750EB"/>
+                  <a:srgbClr val="C45E00"/>
                 </a:solidFill>
                 <a:latin typeface="JetBrains Mono"/>
                 <a:ea typeface="JetBrains Mono"/>
@@ -8264,7 +8264,7 @@
             <a:r>
               <a:rPr sz="1600">
                 <a:solidFill>
-                  <a:srgbClr val="1750EB"/>
+                  <a:srgbClr val="C45E00"/>
                 </a:solidFill>
                 <a:latin typeface="JetBrains Mono"/>
                 <a:ea typeface="JetBrains Mono"/>
@@ -8286,7 +8286,7 @@
             <a:r>
               <a:rPr sz="1600">
                 <a:solidFill>
-                  <a:srgbClr val="1750EB"/>
+                  <a:srgbClr val="C45E00"/>
                 </a:solidFill>
                 <a:latin typeface="JetBrains Mono"/>
                 <a:ea typeface="JetBrains Mono"/>
@@ -8546,7 +8546,7 @@
             <a:r>
               <a:rPr sz="2050" b="0">
                 <a:solidFill>
-                  <a:srgbClr val="1750EB"/>
+                  <a:srgbClr val="C45E00"/>
                 </a:solidFill>
                 <a:latin typeface="JetBrains Mono"/>
                 <a:ea typeface="JetBrains Mono"/>
@@ -8995,7 +8995,7 @@
             <a:r>
               <a:rPr sz="1600">
                 <a:solidFill>
-                  <a:srgbClr val="1750EB"/>
+                  <a:srgbClr val="C45E00"/>
                 </a:solidFill>
                 <a:latin typeface="JetBrains Mono"/>
                 <a:ea typeface="JetBrains Mono"/>
@@ -9017,7 +9017,7 @@
             <a:r>
               <a:rPr sz="1600">
                 <a:solidFill>
-                  <a:srgbClr val="1750EB"/>
+                  <a:srgbClr val="C45E00"/>
                 </a:solidFill>
                 <a:latin typeface="JetBrains Mono"/>
                 <a:ea typeface="JetBrains Mono"/>
@@ -9366,7 +9366,7 @@
             <a:r>
               <a:rPr sz="1800">
                 <a:solidFill>
-                  <a:srgbClr val="1750EB"/>
+                  <a:srgbClr val="C45E00"/>
                 </a:solidFill>
                 <a:latin typeface="JetBrains Mono"/>
                 <a:ea typeface="JetBrains Mono"/>
@@ -9388,7 +9388,7 @@
             <a:r>
               <a:rPr sz="1800">
                 <a:solidFill>
-                  <a:srgbClr val="1750EB"/>
+                  <a:srgbClr val="C45E00"/>
                 </a:solidFill>
                 <a:latin typeface="JetBrains Mono"/>
                 <a:ea typeface="JetBrains Mono"/>

--- a/Mapped Curriculum Lessons/Grade 6/Lesson 08 - Counted Loops/Counted Loops - Slides.pptx
+++ b/Mapped Curriculum Lessons/Grade 6/Lesson 08 - Counted Loops/Counted Loops - Slides.pptx
@@ -2,28 +2,28 @@
 <file path=ppt/presentation.xml><?xml version="1.0" encoding="utf-8"?>
 <p:presentation xmlns:p="http://schemas.openxmlformats.org/presentationml/2006/main" embedTrueTypeFonts="1" saveSubsetFonts="0">
   <p:sldMasterIdLst>
-    <p:sldMasterId xmlns:r="http://schemas.openxmlformats.org/officeDocument/2006/relationships" id="2147483648" r:id="R4fac9019b78847ff"/>
+    <p:sldMasterId xmlns:r="http://schemas.openxmlformats.org/officeDocument/2006/relationships" id="2147483648" r:id="R468acf8d80fe4082"/>
   </p:sldMasterIdLst>
   <p:notesMasterIdLst>
-    <p:notesMasterId xmlns:r="http://schemas.openxmlformats.org/officeDocument/2006/relationships" r:id="Rda3b792c09574f2c"/>
+    <p:notesMasterId xmlns:r="http://schemas.openxmlformats.org/officeDocument/2006/relationships" r:id="R870640c6d5a2498a"/>
   </p:notesMasterIdLst>
   <p:sldIdLst>
-    <p:sldId xmlns:r="http://schemas.openxmlformats.org/officeDocument/2006/relationships" id="256" r:id="Rd40558d2821f40be"/>
-    <p:sldId xmlns:r="http://schemas.openxmlformats.org/officeDocument/2006/relationships" id="257" r:id="Re367a830824f40f3"/>
-    <p:sldId xmlns:r="http://schemas.openxmlformats.org/officeDocument/2006/relationships" id="258" r:id="R045eb1b94c8c421f"/>
-    <p:sldId xmlns:r="http://schemas.openxmlformats.org/officeDocument/2006/relationships" id="259" r:id="R73131abc52874430"/>
-    <p:sldId xmlns:r="http://schemas.openxmlformats.org/officeDocument/2006/relationships" id="260" r:id="R83310e3e234f4acd"/>
-    <p:sldId xmlns:r="http://schemas.openxmlformats.org/officeDocument/2006/relationships" id="261" r:id="R80c0a26c55c04aa8"/>
-    <p:sldId xmlns:r="http://schemas.openxmlformats.org/officeDocument/2006/relationships" id="262" r:id="R7a8a851e11ee4874"/>
-    <p:sldId xmlns:r="http://schemas.openxmlformats.org/officeDocument/2006/relationships" id="263" r:id="R5151ea2ab36c41c3"/>
-    <p:sldId xmlns:r="http://schemas.openxmlformats.org/officeDocument/2006/relationships" id="264" r:id="Rb949e3095ecf4db6"/>
+    <p:sldId xmlns:r="http://schemas.openxmlformats.org/officeDocument/2006/relationships" id="256" r:id="Rd7a990dc630e43d4"/>
+    <p:sldId xmlns:r="http://schemas.openxmlformats.org/officeDocument/2006/relationships" id="257" r:id="R22cfd4b79d0246d2"/>
+    <p:sldId xmlns:r="http://schemas.openxmlformats.org/officeDocument/2006/relationships" id="258" r:id="R1c979cf37b044035"/>
+    <p:sldId xmlns:r="http://schemas.openxmlformats.org/officeDocument/2006/relationships" id="259" r:id="R03d9355b775749a3"/>
+    <p:sldId xmlns:r="http://schemas.openxmlformats.org/officeDocument/2006/relationships" id="260" r:id="R0f29de1e764b4c1c"/>
+    <p:sldId xmlns:r="http://schemas.openxmlformats.org/officeDocument/2006/relationships" id="261" r:id="Rbc0f8cb7b2d2475f"/>
+    <p:sldId xmlns:r="http://schemas.openxmlformats.org/officeDocument/2006/relationships" id="262" r:id="R27f1eb0253d548f7"/>
+    <p:sldId xmlns:r="http://schemas.openxmlformats.org/officeDocument/2006/relationships" id="263" r:id="R037d44e16c85464a"/>
+    <p:sldId xmlns:r="http://schemas.openxmlformats.org/officeDocument/2006/relationships" id="264" r:id="Rac42ca9a17f5460c"/>
   </p:sldIdLst>
   <p:sldSz cx="12192000" cy="6858000"/>
   <p:notesSz cx="6858000" cy="9144000"/>
   <p:embeddedFontLst>
     <p:embeddedFont>
       <p:font typeface="JetBrains Mono"/>
-      <p:regular xmlns:r="http://schemas.openxmlformats.org/officeDocument/2006/relationships" r:id="R294c18af080c4e2a"/>
+      <p:regular xmlns:r="http://schemas.openxmlformats.org/officeDocument/2006/relationships" r:id="Rf11ecc21977d402b"/>
     </p:embeddedFont>
   </p:embeddedFontLst>
 </p:presentation>
@@ -1071,7 +1071,7 @@
           <p:nvPr/>
         </p:nvPicPr>
         <p:blipFill rotWithShape="1">
-          <a:blip xmlns:r="http://schemas.openxmlformats.org/officeDocument/2006/relationships" xmlns:a="http://schemas.openxmlformats.org/drawingml/2006/main" r:embed="Ra59916810c754eab"/>
+          <a:blip xmlns:r="http://schemas.openxmlformats.org/officeDocument/2006/relationships" xmlns:a="http://schemas.openxmlformats.org/drawingml/2006/main" r:embed="Rd68bb3d2f9704f5f"/>
           <a:stretch xmlns:a="http://schemas.openxmlformats.org/drawingml/2006/main"/>
         </p:blipFill>
         <p:spPr>
@@ -1451,7 +1451,7 @@
           <p:nvPr/>
         </p:nvPicPr>
         <p:blipFill rotWithShape="1">
-          <a:blip xmlns:r="http://schemas.openxmlformats.org/officeDocument/2006/relationships" xmlns:a="http://schemas.openxmlformats.org/drawingml/2006/main" r:embed="Rdbc5f72aac2648e8">
+          <a:blip xmlns:r="http://schemas.openxmlformats.org/officeDocument/2006/relationships" xmlns:a="http://schemas.openxmlformats.org/drawingml/2006/main" r:embed="R175f7cc10b524f0e">
             <a:alphaModFix amt="28000"/>
           </a:blip>
           <a:stretch xmlns:a="http://schemas.openxmlformats.org/drawingml/2006/main"/>
@@ -1664,7 +1664,7 @@
           <p:nvPr/>
         </p:nvPicPr>
         <p:blipFill rotWithShape="1">
-          <a:blip xmlns:r="http://schemas.openxmlformats.org/officeDocument/2006/relationships" xmlns:a="http://schemas.openxmlformats.org/drawingml/2006/main" r:embed="R147b54c8b69b4c07">
+          <a:blip xmlns:r="http://schemas.openxmlformats.org/officeDocument/2006/relationships" xmlns:a="http://schemas.openxmlformats.org/drawingml/2006/main" r:embed="Rf378d150bc294039">
             <a:alphaModFix amt="28000"/>
           </a:blip>
           <a:stretch xmlns:a="http://schemas.openxmlformats.org/drawingml/2006/main"/>
@@ -1899,7 +1899,7 @@
           <p:nvPr/>
         </p:nvPicPr>
         <p:blipFill rotWithShape="1">
-          <a:blip xmlns:r="http://schemas.openxmlformats.org/officeDocument/2006/relationships" xmlns:a="http://schemas.openxmlformats.org/drawingml/2006/main" r:embed="R888d669baf534ba9">
+          <a:blip xmlns:r="http://schemas.openxmlformats.org/officeDocument/2006/relationships" xmlns:a="http://schemas.openxmlformats.org/drawingml/2006/main" r:embed="R19ea407ed2c54457">
             <a:alphaModFix amt="28000"/>
           </a:blip>
           <a:stretch xmlns:a="http://schemas.openxmlformats.org/drawingml/2006/main"/>
@@ -2176,7 +2176,7 @@
           <p:nvPr/>
         </p:nvPicPr>
         <p:blipFill rotWithShape="1">
-          <a:blip xmlns:r="http://schemas.openxmlformats.org/officeDocument/2006/relationships" xmlns:a="http://schemas.openxmlformats.org/drawingml/2006/main" r:embed="Rfc22176018c84afc">
+          <a:blip xmlns:r="http://schemas.openxmlformats.org/officeDocument/2006/relationships" xmlns:a="http://schemas.openxmlformats.org/drawingml/2006/main" r:embed="R529df65a8f5c43ab">
             <a:alphaModFix amt="28000"/>
           </a:blip>
           <a:stretch xmlns:a="http://schemas.openxmlformats.org/drawingml/2006/main"/>
@@ -2451,7 +2451,7 @@
           <p:nvPr/>
         </p:nvPicPr>
         <p:blipFill rotWithShape="1">
-          <a:blip xmlns:r="http://schemas.openxmlformats.org/officeDocument/2006/relationships" xmlns:a="http://schemas.openxmlformats.org/drawingml/2006/main" r:embed="Ra1fa088cf98740f2">
+          <a:blip xmlns:r="http://schemas.openxmlformats.org/officeDocument/2006/relationships" xmlns:a="http://schemas.openxmlformats.org/drawingml/2006/main" r:embed="Rb096ce24948a4e23">
             <a:alphaModFix amt="28000"/>
           </a:blip>
           <a:stretch xmlns:a="http://schemas.openxmlformats.org/drawingml/2006/main"/>
@@ -2875,7 +2875,7 @@
           <p:nvPr/>
         </p:nvPicPr>
         <p:blipFill rotWithShape="1">
-          <a:blip xmlns:r="http://schemas.openxmlformats.org/officeDocument/2006/relationships" xmlns:a="http://schemas.openxmlformats.org/drawingml/2006/main" r:embed="R03d363074b0a4997">
+          <a:blip xmlns:r="http://schemas.openxmlformats.org/officeDocument/2006/relationships" xmlns:a="http://schemas.openxmlformats.org/drawingml/2006/main" r:embed="R0c8067e6d1a745e8">
             <a:alphaModFix amt="28000"/>
           </a:blip>
           <a:stretch xmlns:a="http://schemas.openxmlformats.org/drawingml/2006/main"/>
@@ -3016,7 +3016,7 @@
           <p:nvPr/>
         </p:nvPicPr>
         <p:blipFill rotWithShape="1">
-          <a:blip xmlns:r="http://schemas.openxmlformats.org/officeDocument/2006/relationships" xmlns:a="http://schemas.openxmlformats.org/drawingml/2006/main" r:embed="Rfac1638cdabf456b">
+          <a:blip xmlns:r="http://schemas.openxmlformats.org/officeDocument/2006/relationships" xmlns:a="http://schemas.openxmlformats.org/drawingml/2006/main" r:embed="R68ca422390e84941">
             <a:alphaModFix amt="28000"/>
           </a:blip>
           <a:stretch xmlns:a="http://schemas.openxmlformats.org/drawingml/2006/main"/>
@@ -3130,7 +3130,7 @@
           <p:nvPr/>
         </p:nvPicPr>
         <p:blipFill rotWithShape="1">
-          <a:blip xmlns:r="http://schemas.openxmlformats.org/officeDocument/2006/relationships" xmlns:a="http://schemas.openxmlformats.org/drawingml/2006/main" r:embed="R4f587a7a70fe4ea8">
+          <a:blip xmlns:r="http://schemas.openxmlformats.org/officeDocument/2006/relationships" xmlns:a="http://schemas.openxmlformats.org/drawingml/2006/main" r:embed="Re71694c639664f99">
             <a:alphaModFix amt="28000"/>
           </a:blip>
           <a:stretch xmlns:a="http://schemas.openxmlformats.org/drawingml/2006/main"/>
@@ -3457,7 +3457,7 @@
           <p:nvPr/>
         </p:nvPicPr>
         <p:blipFill rotWithShape="1">
-          <a:blip xmlns:r="http://schemas.openxmlformats.org/officeDocument/2006/relationships" xmlns:a="http://schemas.openxmlformats.org/drawingml/2006/main" r:embed="R26de8a4724154d0b">
+          <a:blip xmlns:r="http://schemas.openxmlformats.org/officeDocument/2006/relationships" xmlns:a="http://schemas.openxmlformats.org/drawingml/2006/main" r:embed="R150cf1fadfcc49c3">
             <a:alphaModFix amt="28000"/>
           </a:blip>
           <a:stretch xmlns:a="http://schemas.openxmlformats.org/drawingml/2006/main"/>
@@ -3745,7 +3745,7 @@
           <p:nvPr/>
         </p:nvPicPr>
         <p:blipFill rotWithShape="1">
-          <a:blip xmlns:r="http://schemas.openxmlformats.org/officeDocument/2006/relationships" xmlns:a="http://schemas.openxmlformats.org/drawingml/2006/main" r:embed="R8c5c84af7688410e">
+          <a:blip xmlns:r="http://schemas.openxmlformats.org/officeDocument/2006/relationships" xmlns:a="http://schemas.openxmlformats.org/drawingml/2006/main" r:embed="R90cc9f54c900488e">
             <a:alphaModFix amt="28000"/>
           </a:blip>
           <a:stretch xmlns:a="http://schemas.openxmlformats.org/drawingml/2006/main"/>
@@ -3982,17 +3982,17 @@
   </p:cSld>
   <p:clrMap bg1="lt1" tx1="dk1" bg2="lt2" tx2="dk2" accent1="accent1" accent2="accent2" accent3="accent3" accent4="accent4" accent5="accent5" accent6="accent6" hlink="hlink" folHlink="folHlink"/>
   <p:sldLayoutIdLst>
-    <p:sldLayoutId xmlns:r="http://schemas.openxmlformats.org/officeDocument/2006/relationships" id="2147483649" r:id="R9ab3850f7f6d4b9d"/>
-    <p:sldLayoutId xmlns:r="http://schemas.openxmlformats.org/officeDocument/2006/relationships" id="2147483650" r:id="R51c1f3981ad64e89"/>
-    <p:sldLayoutId xmlns:r="http://schemas.openxmlformats.org/officeDocument/2006/relationships" id="2147483651" r:id="Rc2e83e61fbb241cf"/>
-    <p:sldLayoutId xmlns:r="http://schemas.openxmlformats.org/officeDocument/2006/relationships" id="2147483652" r:id="Ra0b21e8fef53441a"/>
-    <p:sldLayoutId xmlns:r="http://schemas.openxmlformats.org/officeDocument/2006/relationships" id="2147483653" r:id="Ra0712c48793f424b"/>
-    <p:sldLayoutId xmlns:r="http://schemas.openxmlformats.org/officeDocument/2006/relationships" id="2147483654" r:id="R99c7de78caf04406"/>
-    <p:sldLayoutId xmlns:r="http://schemas.openxmlformats.org/officeDocument/2006/relationships" id="2147483655" r:id="Rdf091a9737b0460f"/>
-    <p:sldLayoutId xmlns:r="http://schemas.openxmlformats.org/officeDocument/2006/relationships" id="2147483656" r:id="R03f173d8f4f449b7"/>
-    <p:sldLayoutId xmlns:r="http://schemas.openxmlformats.org/officeDocument/2006/relationships" id="2147483657" r:id="R446343c237624c82"/>
-    <p:sldLayoutId xmlns:r="http://schemas.openxmlformats.org/officeDocument/2006/relationships" id="2147483658" r:id="R2da6c15705b64328"/>
-    <p:sldLayoutId xmlns:r="http://schemas.openxmlformats.org/officeDocument/2006/relationships" id="2147483659" r:id="Ra7b1da58a06e404e"/>
+    <p:sldLayoutId xmlns:r="http://schemas.openxmlformats.org/officeDocument/2006/relationships" id="2147483649" r:id="R2439e09cdec84a49"/>
+    <p:sldLayoutId xmlns:r="http://schemas.openxmlformats.org/officeDocument/2006/relationships" id="2147483650" r:id="R9c88d900cd814454"/>
+    <p:sldLayoutId xmlns:r="http://schemas.openxmlformats.org/officeDocument/2006/relationships" id="2147483651" r:id="R6b44c03f45444c0e"/>
+    <p:sldLayoutId xmlns:r="http://schemas.openxmlformats.org/officeDocument/2006/relationships" id="2147483652" r:id="R5f45fa6db1464f66"/>
+    <p:sldLayoutId xmlns:r="http://schemas.openxmlformats.org/officeDocument/2006/relationships" id="2147483653" r:id="R24872b6630f74814"/>
+    <p:sldLayoutId xmlns:r="http://schemas.openxmlformats.org/officeDocument/2006/relationships" id="2147483654" r:id="Rced0030292224939"/>
+    <p:sldLayoutId xmlns:r="http://schemas.openxmlformats.org/officeDocument/2006/relationships" id="2147483655" r:id="R03e6ef449ed14dca"/>
+    <p:sldLayoutId xmlns:r="http://schemas.openxmlformats.org/officeDocument/2006/relationships" id="2147483656" r:id="Rbbd82f74066b4901"/>
+    <p:sldLayoutId xmlns:r="http://schemas.openxmlformats.org/officeDocument/2006/relationships" id="2147483657" r:id="R05c411ecaf9c48cc"/>
+    <p:sldLayoutId xmlns:r="http://schemas.openxmlformats.org/officeDocument/2006/relationships" id="2147483658" r:id="R6024050d5d5a49e2"/>
+    <p:sldLayoutId xmlns:r="http://schemas.openxmlformats.org/officeDocument/2006/relationships" id="2147483659" r:id="R2fe41253bcb444af"/>
   </p:sldLayoutIdLst>
   <p:hf hdr="0" ftr="0" dt="0"/>
   <p:txStyles>

--- a/Mapped Curriculum Lessons/Grade 6/Lesson 08 - Counted Loops/Counted Loops - Slides.pptx
+++ b/Mapped Curriculum Lessons/Grade 6/Lesson 08 - Counted Loops/Counted Loops - Slides.pptx
@@ -2,28 +2,28 @@
 <file path=ppt/presentation.xml><?xml version="1.0" encoding="utf-8"?>
 <p:presentation xmlns:p="http://schemas.openxmlformats.org/presentationml/2006/main" embedTrueTypeFonts="1" saveSubsetFonts="0">
   <p:sldMasterIdLst>
-    <p:sldMasterId xmlns:r="http://schemas.openxmlformats.org/officeDocument/2006/relationships" id="2147483648" r:id="R468acf8d80fe4082"/>
+    <p:sldMasterId xmlns:r="http://schemas.openxmlformats.org/officeDocument/2006/relationships" id="2147483648" r:id="R0972c4b6bc4c4ac5"/>
   </p:sldMasterIdLst>
   <p:notesMasterIdLst>
-    <p:notesMasterId xmlns:r="http://schemas.openxmlformats.org/officeDocument/2006/relationships" r:id="R870640c6d5a2498a"/>
+    <p:notesMasterId xmlns:r="http://schemas.openxmlformats.org/officeDocument/2006/relationships" r:id="Rcbc36e861848406c"/>
   </p:notesMasterIdLst>
   <p:sldIdLst>
-    <p:sldId xmlns:r="http://schemas.openxmlformats.org/officeDocument/2006/relationships" id="256" r:id="Rd7a990dc630e43d4"/>
-    <p:sldId xmlns:r="http://schemas.openxmlformats.org/officeDocument/2006/relationships" id="257" r:id="R22cfd4b79d0246d2"/>
-    <p:sldId xmlns:r="http://schemas.openxmlformats.org/officeDocument/2006/relationships" id="258" r:id="R1c979cf37b044035"/>
-    <p:sldId xmlns:r="http://schemas.openxmlformats.org/officeDocument/2006/relationships" id="259" r:id="R03d9355b775749a3"/>
-    <p:sldId xmlns:r="http://schemas.openxmlformats.org/officeDocument/2006/relationships" id="260" r:id="R0f29de1e764b4c1c"/>
-    <p:sldId xmlns:r="http://schemas.openxmlformats.org/officeDocument/2006/relationships" id="261" r:id="Rbc0f8cb7b2d2475f"/>
-    <p:sldId xmlns:r="http://schemas.openxmlformats.org/officeDocument/2006/relationships" id="262" r:id="R27f1eb0253d548f7"/>
-    <p:sldId xmlns:r="http://schemas.openxmlformats.org/officeDocument/2006/relationships" id="263" r:id="R037d44e16c85464a"/>
-    <p:sldId xmlns:r="http://schemas.openxmlformats.org/officeDocument/2006/relationships" id="264" r:id="Rac42ca9a17f5460c"/>
+    <p:sldId xmlns:r="http://schemas.openxmlformats.org/officeDocument/2006/relationships" id="256" r:id="R847975cc7935417a"/>
+    <p:sldId xmlns:r="http://schemas.openxmlformats.org/officeDocument/2006/relationships" id="257" r:id="Rcafb748c67534aa6"/>
+    <p:sldId xmlns:r="http://schemas.openxmlformats.org/officeDocument/2006/relationships" id="258" r:id="Rf435d5814d4c4f49"/>
+    <p:sldId xmlns:r="http://schemas.openxmlformats.org/officeDocument/2006/relationships" id="259" r:id="R5f53b2bacc524615"/>
+    <p:sldId xmlns:r="http://schemas.openxmlformats.org/officeDocument/2006/relationships" id="260" r:id="Re13417187b764a9d"/>
+    <p:sldId xmlns:r="http://schemas.openxmlformats.org/officeDocument/2006/relationships" id="261" r:id="Rf4739c8677e34fa8"/>
+    <p:sldId xmlns:r="http://schemas.openxmlformats.org/officeDocument/2006/relationships" id="262" r:id="R8a8f6fa5b8bb44cb"/>
+    <p:sldId xmlns:r="http://schemas.openxmlformats.org/officeDocument/2006/relationships" id="263" r:id="Rb237bdb9d66141ef"/>
+    <p:sldId xmlns:r="http://schemas.openxmlformats.org/officeDocument/2006/relationships" id="264" r:id="R6a54f3c08aa74d1d"/>
   </p:sldIdLst>
   <p:sldSz cx="12192000" cy="6858000"/>
   <p:notesSz cx="6858000" cy="9144000"/>
   <p:embeddedFontLst>
     <p:embeddedFont>
       <p:font typeface="JetBrains Mono"/>
-      <p:regular xmlns:r="http://schemas.openxmlformats.org/officeDocument/2006/relationships" r:id="Rf11ecc21977d402b"/>
+      <p:regular xmlns:r="http://schemas.openxmlformats.org/officeDocument/2006/relationships" r:id="R8aa3650204074538"/>
     </p:embeddedFont>
   </p:embeddedFontLst>
 </p:presentation>
@@ -1071,7 +1071,7 @@
           <p:nvPr/>
         </p:nvPicPr>
         <p:blipFill rotWithShape="1">
-          <a:blip xmlns:r="http://schemas.openxmlformats.org/officeDocument/2006/relationships" xmlns:a="http://schemas.openxmlformats.org/drawingml/2006/main" r:embed="Rd68bb3d2f9704f5f"/>
+          <a:blip xmlns:r="http://schemas.openxmlformats.org/officeDocument/2006/relationships" xmlns:a="http://schemas.openxmlformats.org/drawingml/2006/main" r:embed="Rced53535568148c4"/>
           <a:stretch xmlns:a="http://schemas.openxmlformats.org/drawingml/2006/main"/>
         </p:blipFill>
         <p:spPr>
@@ -1451,7 +1451,7 @@
           <p:nvPr/>
         </p:nvPicPr>
         <p:blipFill rotWithShape="1">
-          <a:blip xmlns:r="http://schemas.openxmlformats.org/officeDocument/2006/relationships" xmlns:a="http://schemas.openxmlformats.org/drawingml/2006/main" r:embed="R175f7cc10b524f0e">
+          <a:blip xmlns:r="http://schemas.openxmlformats.org/officeDocument/2006/relationships" xmlns:a="http://schemas.openxmlformats.org/drawingml/2006/main" r:embed="R6a61bab2fdb44336">
             <a:alphaModFix amt="28000"/>
           </a:blip>
           <a:stretch xmlns:a="http://schemas.openxmlformats.org/drawingml/2006/main"/>
@@ -1664,7 +1664,7 @@
           <p:nvPr/>
         </p:nvPicPr>
         <p:blipFill rotWithShape="1">
-          <a:blip xmlns:r="http://schemas.openxmlformats.org/officeDocument/2006/relationships" xmlns:a="http://schemas.openxmlformats.org/drawingml/2006/main" r:embed="Rf378d150bc294039">
+          <a:blip xmlns:r="http://schemas.openxmlformats.org/officeDocument/2006/relationships" xmlns:a="http://schemas.openxmlformats.org/drawingml/2006/main" r:embed="R8b14cae6eb5b4c25">
             <a:alphaModFix amt="28000"/>
           </a:blip>
           <a:stretch xmlns:a="http://schemas.openxmlformats.org/drawingml/2006/main"/>
@@ -1899,7 +1899,7 @@
           <p:nvPr/>
         </p:nvPicPr>
         <p:blipFill rotWithShape="1">
-          <a:blip xmlns:r="http://schemas.openxmlformats.org/officeDocument/2006/relationships" xmlns:a="http://schemas.openxmlformats.org/drawingml/2006/main" r:embed="R19ea407ed2c54457">
+          <a:blip xmlns:r="http://schemas.openxmlformats.org/officeDocument/2006/relationships" xmlns:a="http://schemas.openxmlformats.org/drawingml/2006/main" r:embed="Ra76d459409fb4612">
             <a:alphaModFix amt="28000"/>
           </a:blip>
           <a:stretch xmlns:a="http://schemas.openxmlformats.org/drawingml/2006/main"/>
@@ -2176,7 +2176,7 @@
           <p:nvPr/>
         </p:nvPicPr>
         <p:blipFill rotWithShape="1">
-          <a:blip xmlns:r="http://schemas.openxmlformats.org/officeDocument/2006/relationships" xmlns:a="http://schemas.openxmlformats.org/drawingml/2006/main" r:embed="R529df65a8f5c43ab">
+          <a:blip xmlns:r="http://schemas.openxmlformats.org/officeDocument/2006/relationships" xmlns:a="http://schemas.openxmlformats.org/drawingml/2006/main" r:embed="R4ae633f209514e94">
             <a:alphaModFix amt="28000"/>
           </a:blip>
           <a:stretch xmlns:a="http://schemas.openxmlformats.org/drawingml/2006/main"/>
@@ -2451,7 +2451,7 @@
           <p:nvPr/>
         </p:nvPicPr>
         <p:blipFill rotWithShape="1">
-          <a:blip xmlns:r="http://schemas.openxmlformats.org/officeDocument/2006/relationships" xmlns:a="http://schemas.openxmlformats.org/drawingml/2006/main" r:embed="Rb096ce24948a4e23">
+          <a:blip xmlns:r="http://schemas.openxmlformats.org/officeDocument/2006/relationships" xmlns:a="http://schemas.openxmlformats.org/drawingml/2006/main" r:embed="R86e829afd7dc4ae3">
             <a:alphaModFix amt="28000"/>
           </a:blip>
           <a:stretch xmlns:a="http://schemas.openxmlformats.org/drawingml/2006/main"/>
@@ -2875,7 +2875,7 @@
           <p:nvPr/>
         </p:nvPicPr>
         <p:blipFill rotWithShape="1">
-          <a:blip xmlns:r="http://schemas.openxmlformats.org/officeDocument/2006/relationships" xmlns:a="http://schemas.openxmlformats.org/drawingml/2006/main" r:embed="R0c8067e6d1a745e8">
+          <a:blip xmlns:r="http://schemas.openxmlformats.org/officeDocument/2006/relationships" xmlns:a="http://schemas.openxmlformats.org/drawingml/2006/main" r:embed="R67331aa7c5d84f1d">
             <a:alphaModFix amt="28000"/>
           </a:blip>
           <a:stretch xmlns:a="http://schemas.openxmlformats.org/drawingml/2006/main"/>
@@ -3016,7 +3016,7 @@
           <p:nvPr/>
         </p:nvPicPr>
         <p:blipFill rotWithShape="1">
-          <a:blip xmlns:r="http://schemas.openxmlformats.org/officeDocument/2006/relationships" xmlns:a="http://schemas.openxmlformats.org/drawingml/2006/main" r:embed="R68ca422390e84941">
+          <a:blip xmlns:r="http://schemas.openxmlformats.org/officeDocument/2006/relationships" xmlns:a="http://schemas.openxmlformats.org/drawingml/2006/main" r:embed="R1eed3b63718543e0">
             <a:alphaModFix amt="28000"/>
           </a:blip>
           <a:stretch xmlns:a="http://schemas.openxmlformats.org/drawingml/2006/main"/>
@@ -3130,7 +3130,7 @@
           <p:nvPr/>
         </p:nvPicPr>
         <p:blipFill rotWithShape="1">
-          <a:blip xmlns:r="http://schemas.openxmlformats.org/officeDocument/2006/relationships" xmlns:a="http://schemas.openxmlformats.org/drawingml/2006/main" r:embed="Re71694c639664f99">
+          <a:blip xmlns:r="http://schemas.openxmlformats.org/officeDocument/2006/relationships" xmlns:a="http://schemas.openxmlformats.org/drawingml/2006/main" r:embed="R5af71a65e2cb4288">
             <a:alphaModFix amt="28000"/>
           </a:blip>
           <a:stretch xmlns:a="http://schemas.openxmlformats.org/drawingml/2006/main"/>
@@ -3457,7 +3457,7 @@
           <p:nvPr/>
         </p:nvPicPr>
         <p:blipFill rotWithShape="1">
-          <a:blip xmlns:r="http://schemas.openxmlformats.org/officeDocument/2006/relationships" xmlns:a="http://schemas.openxmlformats.org/drawingml/2006/main" r:embed="R150cf1fadfcc49c3">
+          <a:blip xmlns:r="http://schemas.openxmlformats.org/officeDocument/2006/relationships" xmlns:a="http://schemas.openxmlformats.org/drawingml/2006/main" r:embed="Rf3b1448480044450">
             <a:alphaModFix amt="28000"/>
           </a:blip>
           <a:stretch xmlns:a="http://schemas.openxmlformats.org/drawingml/2006/main"/>
@@ -3745,7 +3745,7 @@
           <p:nvPr/>
         </p:nvPicPr>
         <p:blipFill rotWithShape="1">
-          <a:blip xmlns:r="http://schemas.openxmlformats.org/officeDocument/2006/relationships" xmlns:a="http://schemas.openxmlformats.org/drawingml/2006/main" r:embed="R90cc9f54c900488e">
+          <a:blip xmlns:r="http://schemas.openxmlformats.org/officeDocument/2006/relationships" xmlns:a="http://schemas.openxmlformats.org/drawingml/2006/main" r:embed="R82c027e6e9dc4ce7">
             <a:alphaModFix amt="28000"/>
           </a:blip>
           <a:stretch xmlns:a="http://schemas.openxmlformats.org/drawingml/2006/main"/>
@@ -3982,17 +3982,17 @@
   </p:cSld>
   <p:clrMap bg1="lt1" tx1="dk1" bg2="lt2" tx2="dk2" accent1="accent1" accent2="accent2" accent3="accent3" accent4="accent4" accent5="accent5" accent6="accent6" hlink="hlink" folHlink="folHlink"/>
   <p:sldLayoutIdLst>
-    <p:sldLayoutId xmlns:r="http://schemas.openxmlformats.org/officeDocument/2006/relationships" id="2147483649" r:id="R2439e09cdec84a49"/>
-    <p:sldLayoutId xmlns:r="http://schemas.openxmlformats.org/officeDocument/2006/relationships" id="2147483650" r:id="R9c88d900cd814454"/>
-    <p:sldLayoutId xmlns:r="http://schemas.openxmlformats.org/officeDocument/2006/relationships" id="2147483651" r:id="R6b44c03f45444c0e"/>
-    <p:sldLayoutId xmlns:r="http://schemas.openxmlformats.org/officeDocument/2006/relationships" id="2147483652" r:id="R5f45fa6db1464f66"/>
-    <p:sldLayoutId xmlns:r="http://schemas.openxmlformats.org/officeDocument/2006/relationships" id="2147483653" r:id="R24872b6630f74814"/>
-    <p:sldLayoutId xmlns:r="http://schemas.openxmlformats.org/officeDocument/2006/relationships" id="2147483654" r:id="Rced0030292224939"/>
-    <p:sldLayoutId xmlns:r="http://schemas.openxmlformats.org/officeDocument/2006/relationships" id="2147483655" r:id="R03e6ef449ed14dca"/>
-    <p:sldLayoutId xmlns:r="http://schemas.openxmlformats.org/officeDocument/2006/relationships" id="2147483656" r:id="Rbbd82f74066b4901"/>
-    <p:sldLayoutId xmlns:r="http://schemas.openxmlformats.org/officeDocument/2006/relationships" id="2147483657" r:id="R05c411ecaf9c48cc"/>
-    <p:sldLayoutId xmlns:r="http://schemas.openxmlformats.org/officeDocument/2006/relationships" id="2147483658" r:id="R6024050d5d5a49e2"/>
-    <p:sldLayoutId xmlns:r="http://schemas.openxmlformats.org/officeDocument/2006/relationships" id="2147483659" r:id="R2fe41253bcb444af"/>
+    <p:sldLayoutId xmlns:r="http://schemas.openxmlformats.org/officeDocument/2006/relationships" id="2147483649" r:id="R6c3137c085b1482f"/>
+    <p:sldLayoutId xmlns:r="http://schemas.openxmlformats.org/officeDocument/2006/relationships" id="2147483650" r:id="R6e5c6261582f4fa1"/>
+    <p:sldLayoutId xmlns:r="http://schemas.openxmlformats.org/officeDocument/2006/relationships" id="2147483651" r:id="R6ac53f2caef24704"/>
+    <p:sldLayoutId xmlns:r="http://schemas.openxmlformats.org/officeDocument/2006/relationships" id="2147483652" r:id="R9bdedbb53d2c406c"/>
+    <p:sldLayoutId xmlns:r="http://schemas.openxmlformats.org/officeDocument/2006/relationships" id="2147483653" r:id="Rdc78bbe0f5dd400b"/>
+    <p:sldLayoutId xmlns:r="http://schemas.openxmlformats.org/officeDocument/2006/relationships" id="2147483654" r:id="Rf3f627cfcb3e4ec1"/>
+    <p:sldLayoutId xmlns:r="http://schemas.openxmlformats.org/officeDocument/2006/relationships" id="2147483655" r:id="R01fe4a410e7c4665"/>
+    <p:sldLayoutId xmlns:r="http://schemas.openxmlformats.org/officeDocument/2006/relationships" id="2147483656" r:id="R58cb3e3871b04bdc"/>
+    <p:sldLayoutId xmlns:r="http://schemas.openxmlformats.org/officeDocument/2006/relationships" id="2147483657" r:id="R4bb644f79c7f40fc"/>
+    <p:sldLayoutId xmlns:r="http://schemas.openxmlformats.org/officeDocument/2006/relationships" id="2147483658" r:id="R05231d3aa748467f"/>
+    <p:sldLayoutId xmlns:r="http://schemas.openxmlformats.org/officeDocument/2006/relationships" id="2147483659" r:id="R5a0c6daea3ec4d34"/>
   </p:sldLayoutIdLst>
   <p:hf hdr="0" ftr="0" dt="0"/>
   <p:txStyles>
@@ -5016,24 +5016,13 @@
             <a:r>
               <a:rPr sz="2400">
                 <a:solidFill>
-                  <a:srgbClr val="080808"/>
-                </a:solidFill>
-                <a:latin typeface="JetBrains Mono"/>
-                <a:ea typeface="JetBrains Mono"/>
-                <a:cs typeface="JetBrains Mono"/>
-              </a:rPr>
-              <a:t> </a:t>
-            </a:r>
-            <a:r>
-              <a:rPr sz="2400">
-                <a:solidFill>
                   <a:srgbClr val="1750EB"/>
                 </a:solidFill>
                 <a:latin typeface="JetBrains Mono"/>
                 <a:ea typeface="JetBrains Mono"/>
                 <a:cs typeface="JetBrains Mono"/>
               </a:rPr>
-              <a:t>range</a:t>
+              <a:t> range</a:t>
             </a:r>
             <a:r>
               <a:rPr sz="2400">
@@ -5057,24 +5046,13 @@
             <a:r>
               <a:rPr sz="2400">
                 <a:solidFill>
-                  <a:srgbClr val="080808"/>
-                </a:solidFill>
-                <a:latin typeface="JetBrains Mono"/>
-                <a:ea typeface="JetBrains Mono"/>
-                <a:cs typeface="JetBrains Mono"/>
-              </a:rPr>
-              <a:t>    </a:t>
-            </a:r>
-            <a:r>
-              <a:rPr sz="2400">
-                <a:solidFill>
                   <a:srgbClr val="1750EB"/>
                 </a:solidFill>
                 <a:latin typeface="JetBrains Mono"/>
                 <a:ea typeface="JetBrains Mono"/>
                 <a:cs typeface="JetBrains Mono"/>
               </a:rPr>
-              <a:t>print</a:t>
+              <a:t>    print</a:t>
             </a:r>
             <a:r>
               <a:rPr sz="2400">
@@ -5537,24 +5515,13 @@
             <a:r>
               <a:rPr sz="2400">
                 <a:solidFill>
-                  <a:srgbClr val="080808"/>
-                </a:solidFill>
-                <a:latin typeface="JetBrains Mono"/>
-                <a:ea typeface="JetBrains Mono"/>
-                <a:cs typeface="JetBrains Mono"/>
-              </a:rPr>
-              <a:t> </a:t>
-            </a:r>
-            <a:r>
-              <a:rPr sz="2400">
-                <a:solidFill>
                   <a:srgbClr val="1750EB"/>
                 </a:solidFill>
                 <a:latin typeface="JetBrains Mono"/>
                 <a:ea typeface="JetBrains Mono"/>
                 <a:cs typeface="JetBrains Mono"/>
               </a:rPr>
-              <a:t>range</a:t>
+              <a:t> range</a:t>
             </a:r>
             <a:r>
               <a:rPr sz="2400">
@@ -5578,24 +5545,13 @@
             <a:r>
               <a:rPr sz="2400">
                 <a:solidFill>
-                  <a:srgbClr val="080808"/>
-                </a:solidFill>
-                <a:latin typeface="JetBrains Mono"/>
-                <a:ea typeface="JetBrains Mono"/>
-                <a:cs typeface="JetBrains Mono"/>
-              </a:rPr>
-              <a:t>    </a:t>
-            </a:r>
-            <a:r>
-              <a:rPr sz="2400">
-                <a:solidFill>
                   <a:srgbClr val="1750EB"/>
                 </a:solidFill>
                 <a:latin typeface="JetBrains Mono"/>
                 <a:ea typeface="JetBrains Mono"/>
                 <a:cs typeface="JetBrains Mono"/>
               </a:rPr>
-              <a:t>print</a:t>
+              <a:t>    print</a:t>
             </a:r>
             <a:r>
               <a:rPr sz="2400">
@@ -6058,24 +6014,13 @@
             <a:r>
               <a:rPr sz="2400">
                 <a:solidFill>
-                  <a:srgbClr val="080808"/>
-                </a:solidFill>
-                <a:latin typeface="JetBrains Mono"/>
-                <a:ea typeface="JetBrains Mono"/>
-                <a:cs typeface="JetBrains Mono"/>
-              </a:rPr>
-              <a:t> </a:t>
-            </a:r>
-            <a:r>
-              <a:rPr sz="2400">
-                <a:solidFill>
                   <a:srgbClr val="1750EB"/>
                 </a:solidFill>
                 <a:latin typeface="JetBrains Mono"/>
                 <a:ea typeface="JetBrains Mono"/>
                 <a:cs typeface="JetBrains Mono"/>
               </a:rPr>
-              <a:t>range</a:t>
+              <a:t> range</a:t>
             </a:r>
             <a:r>
               <a:rPr sz="2400">
@@ -6099,24 +6044,13 @@
             <a:r>
               <a:rPr sz="2400">
                 <a:solidFill>
-                  <a:srgbClr val="080808"/>
-                </a:solidFill>
-                <a:latin typeface="JetBrains Mono"/>
-                <a:ea typeface="JetBrains Mono"/>
-                <a:cs typeface="JetBrains Mono"/>
-              </a:rPr>
-              <a:t>    </a:t>
-            </a:r>
-            <a:r>
-              <a:rPr sz="2400">
-                <a:solidFill>
                   <a:srgbClr val="1750EB"/>
                 </a:solidFill>
                 <a:latin typeface="JetBrains Mono"/>
                 <a:ea typeface="JetBrains Mono"/>
                 <a:cs typeface="JetBrains Mono"/>
               </a:rPr>
-              <a:t>print</a:t>
+              <a:t>    print</a:t>
             </a:r>
             <a:r>
               <a:rPr sz="2400">
@@ -6832,24 +6766,13 @@
             <a:r>
               <a:rPr sz="1600">
                 <a:solidFill>
-                  <a:srgbClr val="080808"/>
-                </a:solidFill>
-                <a:latin typeface="JetBrains Mono"/>
-                <a:ea typeface="JetBrains Mono"/>
-                <a:cs typeface="JetBrains Mono"/>
-              </a:rPr>
-              <a:t> </a:t>
-            </a:r>
-            <a:r>
-              <a:rPr sz="1600">
-                <a:solidFill>
                   <a:srgbClr val="1750EB"/>
                 </a:solidFill>
                 <a:latin typeface="JetBrains Mono"/>
                 <a:ea typeface="JetBrains Mono"/>
                 <a:cs typeface="JetBrains Mono"/>
               </a:rPr>
-              <a:t>range</a:t>
+              <a:t> range</a:t>
             </a:r>
             <a:r>
               <a:rPr sz="1600">
@@ -6875,24 +6798,13 @@
             <a:r>
               <a:rPr sz="1600">
                 <a:solidFill>
-                  <a:srgbClr val="080808"/>
-                </a:solidFill>
-                <a:latin typeface="JetBrains Mono"/>
-                <a:ea typeface="JetBrains Mono"/>
-                <a:cs typeface="JetBrains Mono"/>
-              </a:rPr>
-              <a:t>    </a:t>
-            </a:r>
-            <a:r>
-              <a:rPr sz="1600">
-                <a:solidFill>
                   <a:srgbClr val="1750EB"/>
                 </a:solidFill>
                 <a:latin typeface="JetBrains Mono"/>
                 <a:ea typeface="JetBrains Mono"/>
                 <a:cs typeface="JetBrains Mono"/>
               </a:rPr>
-              <a:t>print</a:t>
+              <a:t>    print</a:t>
             </a:r>
             <a:r>
               <a:rPr sz="1600">
@@ -7566,24 +7478,13 @@
             <a:r>
               <a:rPr sz="1600">
                 <a:solidFill>
-                  <a:srgbClr val="080808"/>
-                </a:solidFill>
-                <a:latin typeface="JetBrains Mono"/>
-                <a:ea typeface="JetBrains Mono"/>
-                <a:cs typeface="JetBrains Mono"/>
-              </a:rPr>
-              <a:t> </a:t>
-            </a:r>
-            <a:r>
-              <a:rPr sz="1600">
-                <a:solidFill>
                   <a:srgbClr val="1750EB"/>
                 </a:solidFill>
                 <a:latin typeface="JetBrains Mono"/>
                 <a:ea typeface="JetBrains Mono"/>
                 <a:cs typeface="JetBrains Mono"/>
               </a:rPr>
-              <a:t>range</a:t>
+              <a:t> range</a:t>
             </a:r>
             <a:r>
               <a:rPr sz="1600">
@@ -7609,24 +7510,13 @@
             <a:r>
               <a:rPr sz="1600">
                 <a:solidFill>
-                  <a:srgbClr val="080808"/>
-                </a:solidFill>
-                <a:latin typeface="JetBrains Mono"/>
-                <a:ea typeface="JetBrains Mono"/>
-                <a:cs typeface="JetBrains Mono"/>
-              </a:rPr>
-              <a:t>    </a:t>
-            </a:r>
-            <a:r>
-              <a:rPr sz="1600">
-                <a:solidFill>
                   <a:srgbClr val="1750EB"/>
                 </a:solidFill>
                 <a:latin typeface="JetBrains Mono"/>
                 <a:ea typeface="JetBrains Mono"/>
                 <a:cs typeface="JetBrains Mono"/>
               </a:rPr>
-              <a:t>print</a:t>
+              <a:t>    print</a:t>
             </a:r>
             <a:r>
               <a:rPr sz="1600">
@@ -8297,24 +8187,13 @@
             <a:r>
               <a:rPr sz="1600">
                 <a:solidFill>
-                  <a:srgbClr val="080808"/>
-                </a:solidFill>
-                <a:latin typeface="JetBrains Mono"/>
-                <a:ea typeface="JetBrains Mono"/>
-                <a:cs typeface="JetBrains Mono"/>
-              </a:rPr>
-              <a:t> </a:t>
-            </a:r>
-            <a:r>
-              <a:rPr sz="1600">
-                <a:solidFill>
                   <a:srgbClr val="1750EB"/>
                 </a:solidFill>
                 <a:latin typeface="JetBrains Mono"/>
                 <a:ea typeface="JetBrains Mono"/>
                 <a:cs typeface="JetBrains Mono"/>
               </a:rPr>
-              <a:t>range</a:t>
+              <a:t> range</a:t>
             </a:r>
             <a:r>
               <a:rPr sz="1600">
@@ -8340,24 +8219,13 @@
             <a:r>
               <a:rPr sz="1600">
                 <a:solidFill>
-                  <a:srgbClr val="080808"/>
-                </a:solidFill>
-                <a:latin typeface="JetBrains Mono"/>
-                <a:ea typeface="JetBrains Mono"/>
-                <a:cs typeface="JetBrains Mono"/>
-              </a:rPr>
-              <a:t>    </a:t>
-            </a:r>
-            <a:r>
-              <a:rPr sz="1600">
-                <a:solidFill>
                   <a:srgbClr val="1750EB"/>
                 </a:solidFill>
                 <a:latin typeface="JetBrains Mono"/>
                 <a:ea typeface="JetBrains Mono"/>
                 <a:cs typeface="JetBrains Mono"/>
               </a:rPr>
-              <a:t>print</a:t>
+              <a:t>    print</a:t>
             </a:r>
             <a:r>
               <a:rPr sz="1600">
@@ -9028,24 +8896,13 @@
             <a:r>
               <a:rPr sz="1600">
                 <a:solidFill>
-                  <a:srgbClr val="080808"/>
-                </a:solidFill>
-                <a:latin typeface="JetBrains Mono"/>
-                <a:ea typeface="JetBrains Mono"/>
-                <a:cs typeface="JetBrains Mono"/>
-              </a:rPr>
-              <a:t> </a:t>
-            </a:r>
-            <a:r>
-              <a:rPr sz="1600">
-                <a:solidFill>
                   <a:srgbClr val="1750EB"/>
                 </a:solidFill>
                 <a:latin typeface="JetBrains Mono"/>
                 <a:ea typeface="JetBrains Mono"/>
                 <a:cs typeface="JetBrains Mono"/>
               </a:rPr>
-              <a:t>range</a:t>
+              <a:t> range</a:t>
             </a:r>
             <a:r>
               <a:rPr sz="1600">
@@ -9071,24 +8928,13 @@
             <a:r>
               <a:rPr sz="1600">
                 <a:solidFill>
-                  <a:srgbClr val="080808"/>
-                </a:solidFill>
-                <a:latin typeface="JetBrains Mono"/>
-                <a:ea typeface="JetBrains Mono"/>
-                <a:cs typeface="JetBrains Mono"/>
-              </a:rPr>
-              <a:t>    </a:t>
-            </a:r>
-            <a:r>
-              <a:rPr sz="1600">
-                <a:solidFill>
                   <a:srgbClr val="1750EB"/>
                 </a:solidFill>
                 <a:latin typeface="JetBrains Mono"/>
                 <a:ea typeface="JetBrains Mono"/>
                 <a:cs typeface="JetBrains Mono"/>
               </a:rPr>
-              <a:t>print</a:t>
+              <a:t>    print</a:t>
             </a:r>
             <a:r>
               <a:rPr sz="1600">
@@ -9399,24 +9245,13 @@
             <a:r>
               <a:rPr sz="1800">
                 <a:solidFill>
-                  <a:srgbClr val="080808"/>
-                </a:solidFill>
-                <a:latin typeface="JetBrains Mono"/>
-                <a:ea typeface="JetBrains Mono"/>
-                <a:cs typeface="JetBrains Mono"/>
-              </a:rPr>
-              <a:t> </a:t>
-            </a:r>
-            <a:r>
-              <a:rPr sz="1800">
-                <a:solidFill>
                   <a:srgbClr val="1750EB"/>
                 </a:solidFill>
                 <a:latin typeface="JetBrains Mono"/>
                 <a:ea typeface="JetBrains Mono"/>
                 <a:cs typeface="JetBrains Mono"/>
               </a:rPr>
-              <a:t>range</a:t>
+              <a:t> range</a:t>
             </a:r>
             <a:r>
               <a:rPr sz="1800">
@@ -9440,24 +9275,13 @@
             <a:r>
               <a:rPr sz="1800">
                 <a:solidFill>
-                  <a:srgbClr val="080808"/>
-                </a:solidFill>
-                <a:latin typeface="JetBrains Mono"/>
-                <a:ea typeface="JetBrains Mono"/>
-                <a:cs typeface="JetBrains Mono"/>
-              </a:rPr>
-              <a:t>    </a:t>
-            </a:r>
-            <a:r>
-              <a:rPr sz="1800">
-                <a:solidFill>
                   <a:srgbClr val="1750EB"/>
                 </a:solidFill>
                 <a:latin typeface="JetBrains Mono"/>
                 <a:ea typeface="JetBrains Mono"/>
                 <a:cs typeface="JetBrains Mono"/>
               </a:rPr>
-              <a:t>print</a:t>
+              <a:t>    print</a:t>
             </a:r>
             <a:r>
               <a:rPr sz="1800">
